--- a/Slide_Teoriche_Classi_JS.pptx
+++ b/Slide_Teoriche_Classi_JS.pptx
@@ -5688,7 +5688,9 @@
     <dgm:cxn modelId="{7C422364-DB18-44E2-B73D-1A44B1F659B2}" type="presParOf" srcId="{3E68506F-57BE-4283-A2FB-145A6B52EAB5}" destId="{AE6F7068-3FFD-4653-A701-582E4BBD35E0}" srcOrd="1" destOrd="0" presId="urn:microsoft.com/office/officeart/2018/2/layout/IconLabelList"/>
     <dgm:cxn modelId="{6080F8D2-9DD9-4FE9-9841-A55AB2E815D3}" type="presParOf" srcId="{3E68506F-57BE-4283-A2FB-145A6B52EAB5}" destId="{071B1322-6D32-4B8C-81A2-E838C6EC5B27}" srcOrd="2" destOrd="0" presId="urn:microsoft.com/office/officeart/2018/2/layout/IconLabelList"/>
   </dgm:cxnLst>
-  <dgm:bg/>
+  <dgm:bg>
+    <a:noFill/>
+  </dgm:bg>
   <dgm:whole/>
   <dgm:extLst>
     <a:ext uri="http://schemas.microsoft.com/office/drawing/2008/diagram">
@@ -6577,10 +6579,22 @@
         <a:lstStyle/>
         <a:p>
           <a:r>
-            <a:rPr lang="en-US" b="0" i="0"/>
-            <a:t>- Getter/Setter: accesso controllato alle proprietà</a:t>
+            <a:rPr lang="en-US" b="0" i="0" dirty="0"/>
+            <a:t>- Getter/Setter: accesso </a:t>
           </a:r>
-          <a:endParaRPr lang="en-US"/>
+          <a:r>
+            <a:rPr lang="en-US" b="0" i="0" dirty="0" err="1"/>
+            <a:t>controllato</a:t>
+          </a:r>
+          <a:r>
+            <a:rPr lang="en-US" b="0" i="0" dirty="0"/>
+            <a:t> alle </a:t>
+          </a:r>
+          <a:r>
+            <a:rPr lang="en-US" b="0" i="0" dirty="0" err="1"/>
+            <a:t>proprietà</a:t>
+          </a:r>
+          <a:endParaRPr lang="en-US" dirty="0"/>
         </a:p>
       </dgm:t>
     </dgm:pt>
@@ -8971,10 +8985,22 @@
             <a:buNone/>
           </a:pPr>
           <a:r>
-            <a:rPr lang="en-US" sz="1900" b="0" i="0" kern="1200"/>
-            <a:t>- Getter/Setter: accesso controllato alle proprietà</a:t>
+            <a:rPr lang="en-US" sz="1900" b="0" i="0" kern="1200" dirty="0"/>
+            <a:t>- Getter/Setter: accesso </a:t>
           </a:r>
-          <a:endParaRPr lang="en-US" sz="1900" kern="1200"/>
+          <a:r>
+            <a:rPr lang="en-US" sz="1900" b="0" i="0" kern="1200" dirty="0" err="1"/>
+            <a:t>controllato</a:t>
+          </a:r>
+          <a:r>
+            <a:rPr lang="en-US" sz="1900" b="0" i="0" kern="1200" dirty="0"/>
+            <a:t> alle </a:t>
+          </a:r>
+          <a:r>
+            <a:rPr lang="en-US" sz="1900" b="0" i="0" kern="1200" dirty="0" err="1"/>
+            <a:t>proprietà</a:t>
+          </a:r>
+          <a:endParaRPr lang="en-US" sz="1900" kern="1200" dirty="0"/>
         </a:p>
       </dsp:txBody>
       <dsp:txXfrm>
@@ -31767,6 +31793,66 @@
           </a:graphicData>
         </a:graphic>
       </p:graphicFrame>
+      <p:pic>
+        <p:nvPicPr>
+          <p:cNvPr id="8" name="Immagine 7" descr="Immagine che contiene cerchio, Elementi grafici, design, schermata&#10;&#10;Il contenuto generato dall'IA potrebbe non essere corretto.">
+            <a:extLst>
+              <a:ext uri="{FF2B5EF4-FFF2-40B4-BE49-F238E27FC236}">
+                <a16:creationId xmlns:a16="http://schemas.microsoft.com/office/drawing/2014/main" id="{832BD94E-EC08-C54F-EFE0-D39874BCAECD}"/>
+              </a:ext>
+            </a:extLst>
+          </p:cNvPr>
+          <p:cNvPicPr>
+            <a:picLocks noChangeAspect="1"/>
+          </p:cNvPicPr>
+          <p:nvPr/>
+        </p:nvPicPr>
+        <p:blipFill>
+          <a:blip r:embed="rId7"/>
+          <a:stretch>
+            <a:fillRect/>
+          </a:stretch>
+        </p:blipFill>
+        <p:spPr>
+          <a:xfrm>
+            <a:off x="6894909" y="-76844"/>
+            <a:ext cx="2381250" cy="2428875"/>
+          </a:xfrm>
+          <a:prstGeom prst="rect">
+            <a:avLst/>
+          </a:prstGeom>
+        </p:spPr>
+      </p:pic>
+      <p:pic>
+        <p:nvPicPr>
+          <p:cNvPr id="10" name="Immagine 9">
+            <a:extLst>
+              <a:ext uri="{FF2B5EF4-FFF2-40B4-BE49-F238E27FC236}">
+                <a16:creationId xmlns:a16="http://schemas.microsoft.com/office/drawing/2014/main" id="{8665DA0A-60CF-D822-2437-9BD6A184E033}"/>
+              </a:ext>
+            </a:extLst>
+          </p:cNvPr>
+          <p:cNvPicPr>
+            <a:picLocks noChangeAspect="1"/>
+          </p:cNvPicPr>
+          <p:nvPr/>
+        </p:nvPicPr>
+        <p:blipFill>
+          <a:blip r:embed="rId8"/>
+          <a:stretch>
+            <a:fillRect/>
+          </a:stretch>
+        </p:blipFill>
+        <p:spPr>
+          <a:xfrm>
+            <a:off x="675084" y="6302904"/>
+            <a:ext cx="7667625" cy="466725"/>
+          </a:xfrm>
+          <a:prstGeom prst="rect">
+            <a:avLst/>
+          </a:prstGeom>
+        </p:spPr>
+      </p:pic>
     </p:spTree>
   </p:cSld>
   <p:clrMapOvr>
@@ -32164,6 +32250,36 @@
           <a:xfrm>
             <a:off x="20" y="10"/>
             <a:ext cx="9143980" cy="6857990"/>
+          </a:xfrm>
+          <a:prstGeom prst="rect">
+            <a:avLst/>
+          </a:prstGeom>
+        </p:spPr>
+      </p:pic>
+      <p:pic>
+        <p:nvPicPr>
+          <p:cNvPr id="3" name="Immagine 2" descr="Immagine che contiene cerchio, Elementi grafici, design, schermata&#10;&#10;Il contenuto generato dall'IA potrebbe non essere corretto.">
+            <a:extLst>
+              <a:ext uri="{FF2B5EF4-FFF2-40B4-BE49-F238E27FC236}">
+                <a16:creationId xmlns:a16="http://schemas.microsoft.com/office/drawing/2014/main" id="{A38F299A-F074-0494-7DBD-A1169AA7086B}"/>
+              </a:ext>
+            </a:extLst>
+          </p:cNvPr>
+          <p:cNvPicPr>
+            <a:picLocks noChangeAspect="1"/>
+          </p:cNvPicPr>
+          <p:nvPr/>
+        </p:nvPicPr>
+        <p:blipFill>
+          <a:blip r:embed="rId8"/>
+          <a:stretch>
+            <a:fillRect/>
+          </a:stretch>
+        </p:blipFill>
+        <p:spPr>
+          <a:xfrm>
+            <a:off x="6827058" y="-71438"/>
+            <a:ext cx="2381250" cy="2428875"/>
           </a:xfrm>
           <a:prstGeom prst="rect">
             <a:avLst/>
@@ -32700,6 +32816,36 @@
           </a:p>
         </p:txBody>
       </p:sp>
+      <p:pic>
+        <p:nvPicPr>
+          <p:cNvPr id="3" name="Immagine 2" descr="Immagine che contiene cerchio, Elementi grafici, design, schermata&#10;&#10;Il contenuto generato dall'IA potrebbe non essere corretto.">
+            <a:extLst>
+              <a:ext uri="{FF2B5EF4-FFF2-40B4-BE49-F238E27FC236}">
+                <a16:creationId xmlns:a16="http://schemas.microsoft.com/office/drawing/2014/main" id="{7778E3AC-F7CE-AC9F-8E8F-01E0B6DAEDEF}"/>
+              </a:ext>
+            </a:extLst>
+          </p:cNvPr>
+          <p:cNvPicPr>
+            <a:picLocks noChangeAspect="1"/>
+          </p:cNvPicPr>
+          <p:nvPr/>
+        </p:nvPicPr>
+        <p:blipFill>
+          <a:blip r:embed="rId8"/>
+          <a:stretch>
+            <a:fillRect/>
+          </a:stretch>
+        </p:blipFill>
+        <p:spPr>
+          <a:xfrm>
+            <a:off x="6894909" y="-73031"/>
+            <a:ext cx="2381250" cy="2428875"/>
+          </a:xfrm>
+          <a:prstGeom prst="rect">
+            <a:avLst/>
+          </a:prstGeom>
+        </p:spPr>
+      </p:pic>
     </p:spTree>
     <p:extLst>
       <p:ext uri="{BB962C8B-B14F-4D97-AF65-F5344CB8AC3E}">
@@ -33796,6 +33942,66 @@
           </a:graphicData>
         </a:graphic>
       </p:graphicFrame>
+      <p:pic>
+        <p:nvPicPr>
+          <p:cNvPr id="4" name="Immagine 3" descr="Immagine che contiene cerchio, Elementi grafici, design, schermata&#10;&#10;Il contenuto generato dall'IA potrebbe non essere corretto.">
+            <a:extLst>
+              <a:ext uri="{FF2B5EF4-FFF2-40B4-BE49-F238E27FC236}">
+                <a16:creationId xmlns:a16="http://schemas.microsoft.com/office/drawing/2014/main" id="{0F06316D-B9AA-D448-5CA5-ED877B7B6436}"/>
+              </a:ext>
+            </a:extLst>
+          </p:cNvPr>
+          <p:cNvPicPr>
+            <a:picLocks noChangeAspect="1"/>
+          </p:cNvPicPr>
+          <p:nvPr/>
+        </p:nvPicPr>
+        <p:blipFill>
+          <a:blip r:embed="rId7"/>
+          <a:stretch>
+            <a:fillRect/>
+          </a:stretch>
+        </p:blipFill>
+        <p:spPr>
+          <a:xfrm>
+            <a:off x="6964022" y="-76844"/>
+            <a:ext cx="2381250" cy="2428875"/>
+          </a:xfrm>
+          <a:prstGeom prst="rect">
+            <a:avLst/>
+          </a:prstGeom>
+        </p:spPr>
+      </p:pic>
+      <p:pic>
+        <p:nvPicPr>
+          <p:cNvPr id="7" name="Immagine 6">
+            <a:extLst>
+              <a:ext uri="{FF2B5EF4-FFF2-40B4-BE49-F238E27FC236}">
+                <a16:creationId xmlns:a16="http://schemas.microsoft.com/office/drawing/2014/main" id="{C38F68E3-5606-1756-F608-8D457B404E54}"/>
+              </a:ext>
+            </a:extLst>
+          </p:cNvPr>
+          <p:cNvPicPr>
+            <a:picLocks noChangeAspect="1"/>
+          </p:cNvPicPr>
+          <p:nvPr/>
+        </p:nvPicPr>
+        <p:blipFill>
+          <a:blip r:embed="rId8"/>
+          <a:stretch>
+            <a:fillRect/>
+          </a:stretch>
+        </p:blipFill>
+        <p:spPr>
+          <a:xfrm>
+            <a:off x="738186" y="6228733"/>
+            <a:ext cx="7667625" cy="466725"/>
+          </a:xfrm>
+          <a:prstGeom prst="rect">
+            <a:avLst/>
+          </a:prstGeom>
+        </p:spPr>
+      </p:pic>
     </p:spTree>
   </p:cSld>
   <p:clrMapOvr>
@@ -34887,6 +35093,66 @@
           </a:graphicData>
         </a:graphic>
       </p:graphicFrame>
+      <p:pic>
+        <p:nvPicPr>
+          <p:cNvPr id="4" name="Immagine 3" descr="Immagine che contiene cerchio, Elementi grafici, design, schermata&#10;&#10;Il contenuto generato dall'IA potrebbe non essere corretto.">
+            <a:extLst>
+              <a:ext uri="{FF2B5EF4-FFF2-40B4-BE49-F238E27FC236}">
+                <a16:creationId xmlns:a16="http://schemas.microsoft.com/office/drawing/2014/main" id="{C69FFD99-4B92-E634-12D4-1F3723E7C8EA}"/>
+              </a:ext>
+            </a:extLst>
+          </p:cNvPr>
+          <p:cNvPicPr>
+            <a:picLocks noChangeAspect="1"/>
+          </p:cNvPicPr>
+          <p:nvPr/>
+        </p:nvPicPr>
+        <p:blipFill>
+          <a:blip r:embed="rId7"/>
+          <a:stretch>
+            <a:fillRect/>
+          </a:stretch>
+        </p:blipFill>
+        <p:spPr>
+          <a:xfrm>
+            <a:off x="6964022" y="-96010"/>
+            <a:ext cx="2381250" cy="2428875"/>
+          </a:xfrm>
+          <a:prstGeom prst="rect">
+            <a:avLst/>
+          </a:prstGeom>
+        </p:spPr>
+      </p:pic>
+      <p:pic>
+        <p:nvPicPr>
+          <p:cNvPr id="7" name="Immagine 6">
+            <a:extLst>
+              <a:ext uri="{FF2B5EF4-FFF2-40B4-BE49-F238E27FC236}">
+                <a16:creationId xmlns:a16="http://schemas.microsoft.com/office/drawing/2014/main" id="{8A46CEFE-ACC5-73FF-9BC2-E590D5433679}"/>
+              </a:ext>
+            </a:extLst>
+          </p:cNvPr>
+          <p:cNvPicPr>
+            <a:picLocks noChangeAspect="1"/>
+          </p:cNvPicPr>
+          <p:nvPr/>
+        </p:nvPicPr>
+        <p:blipFill>
+          <a:blip r:embed="rId8"/>
+          <a:stretch>
+            <a:fillRect/>
+          </a:stretch>
+        </p:blipFill>
+        <p:spPr>
+          <a:xfrm>
+            <a:off x="738186" y="6271902"/>
+            <a:ext cx="7667625" cy="466725"/>
+          </a:xfrm>
+          <a:prstGeom prst="rect">
+            <a:avLst/>
+          </a:prstGeom>
+        </p:spPr>
+      </p:pic>
     </p:spTree>
   </p:cSld>
   <p:clrMapOvr>
@@ -35973,6 +36239,66 @@
           </a:graphicData>
         </a:graphic>
       </p:graphicFrame>
+      <p:pic>
+        <p:nvPicPr>
+          <p:cNvPr id="4" name="Immagine 3" descr="Immagine che contiene cerchio, Elementi grafici, design, schermata&#10;&#10;Il contenuto generato dall'IA potrebbe non essere corretto.">
+            <a:extLst>
+              <a:ext uri="{FF2B5EF4-FFF2-40B4-BE49-F238E27FC236}">
+                <a16:creationId xmlns:a16="http://schemas.microsoft.com/office/drawing/2014/main" id="{E6342D6C-17F6-B4F6-4A5A-9333CD0FBC1D}"/>
+              </a:ext>
+            </a:extLst>
+          </p:cNvPr>
+          <p:cNvPicPr>
+            <a:picLocks noChangeAspect="1"/>
+          </p:cNvPicPr>
+          <p:nvPr/>
+        </p:nvPicPr>
+        <p:blipFill>
+          <a:blip r:embed="rId7"/>
+          <a:stretch>
+            <a:fillRect/>
+          </a:stretch>
+        </p:blipFill>
+        <p:spPr>
+          <a:xfrm>
+            <a:off x="6964022" y="-76844"/>
+            <a:ext cx="2381250" cy="2428875"/>
+          </a:xfrm>
+          <a:prstGeom prst="rect">
+            <a:avLst/>
+          </a:prstGeom>
+        </p:spPr>
+      </p:pic>
+      <p:pic>
+        <p:nvPicPr>
+          <p:cNvPr id="7" name="Immagine 6">
+            <a:extLst>
+              <a:ext uri="{FF2B5EF4-FFF2-40B4-BE49-F238E27FC236}">
+                <a16:creationId xmlns:a16="http://schemas.microsoft.com/office/drawing/2014/main" id="{81D59175-3C93-931E-885B-1E49E627F651}"/>
+              </a:ext>
+            </a:extLst>
+          </p:cNvPr>
+          <p:cNvPicPr>
+            <a:picLocks noChangeAspect="1"/>
+          </p:cNvPicPr>
+          <p:nvPr/>
+        </p:nvPicPr>
+        <p:blipFill>
+          <a:blip r:embed="rId8"/>
+          <a:stretch>
+            <a:fillRect/>
+          </a:stretch>
+        </p:blipFill>
+        <p:spPr>
+          <a:xfrm>
+            <a:off x="738187" y="6283007"/>
+            <a:ext cx="7667625" cy="466725"/>
+          </a:xfrm>
+          <a:prstGeom prst="rect">
+            <a:avLst/>
+          </a:prstGeom>
+        </p:spPr>
+      </p:pic>
     </p:spTree>
   </p:cSld>
   <p:clrMapOvr>
@@ -36444,6 +36770,66 @@
           </a:p>
         </p:txBody>
       </p:sp>
+      <p:pic>
+        <p:nvPicPr>
+          <p:cNvPr id="5" name="Immagine 4" descr="Immagine che contiene cerchio, Elementi grafici, design, schermata&#10;&#10;Il contenuto generato dall'IA potrebbe non essere corretto.">
+            <a:extLst>
+              <a:ext uri="{FF2B5EF4-FFF2-40B4-BE49-F238E27FC236}">
+                <a16:creationId xmlns:a16="http://schemas.microsoft.com/office/drawing/2014/main" id="{1107A94A-2FFE-366A-86DA-C16A922B97AF}"/>
+              </a:ext>
+            </a:extLst>
+          </p:cNvPr>
+          <p:cNvPicPr>
+            <a:picLocks noChangeAspect="1"/>
+          </p:cNvPicPr>
+          <p:nvPr/>
+        </p:nvPicPr>
+        <p:blipFill>
+          <a:blip r:embed="rId2"/>
+          <a:stretch>
+            <a:fillRect/>
+          </a:stretch>
+        </p:blipFill>
+        <p:spPr>
+          <a:xfrm>
+            <a:off x="7466053" y="-61455"/>
+            <a:ext cx="1776075" cy="1811597"/>
+          </a:xfrm>
+          <a:prstGeom prst="rect">
+            <a:avLst/>
+          </a:prstGeom>
+        </p:spPr>
+      </p:pic>
+      <p:pic>
+        <p:nvPicPr>
+          <p:cNvPr id="7" name="Immagine 6">
+            <a:extLst>
+              <a:ext uri="{FF2B5EF4-FFF2-40B4-BE49-F238E27FC236}">
+                <a16:creationId xmlns:a16="http://schemas.microsoft.com/office/drawing/2014/main" id="{8B1D2F9A-4A99-9C0C-8653-4210207B802F}"/>
+              </a:ext>
+            </a:extLst>
+          </p:cNvPr>
+          <p:cNvPicPr>
+            <a:picLocks noChangeAspect="1"/>
+          </p:cNvPicPr>
+          <p:nvPr/>
+        </p:nvPicPr>
+        <p:blipFill>
+          <a:blip r:embed="rId3"/>
+          <a:stretch>
+            <a:fillRect/>
+          </a:stretch>
+        </p:blipFill>
+        <p:spPr>
+          <a:xfrm>
+            <a:off x="695407" y="6314774"/>
+            <a:ext cx="7667625" cy="466725"/>
+          </a:xfrm>
+          <a:prstGeom prst="rect">
+            <a:avLst/>
+          </a:prstGeom>
+        </p:spPr>
+      </p:pic>
     </p:spTree>
     <p:extLst>
       <p:ext uri="{BB962C8B-B14F-4D97-AF65-F5344CB8AC3E}">
@@ -36803,6 +37189,66 @@
           </a:graphicData>
         </a:graphic>
       </p:graphicFrame>
+      <p:pic>
+        <p:nvPicPr>
+          <p:cNvPr id="4" name="Immagine 3" descr="Immagine che contiene cerchio, Elementi grafici, design, schermata&#10;&#10;Il contenuto generato dall'IA potrebbe non essere corretto.">
+            <a:extLst>
+              <a:ext uri="{FF2B5EF4-FFF2-40B4-BE49-F238E27FC236}">
+                <a16:creationId xmlns:a16="http://schemas.microsoft.com/office/drawing/2014/main" id="{FA003DC4-CFB0-F09F-B7A0-98ADE25D4F0F}"/>
+              </a:ext>
+            </a:extLst>
+          </p:cNvPr>
+          <p:cNvPicPr>
+            <a:picLocks noChangeAspect="1"/>
+          </p:cNvPicPr>
+          <p:nvPr/>
+        </p:nvPicPr>
+        <p:blipFill>
+          <a:blip r:embed="rId7"/>
+          <a:stretch>
+            <a:fillRect/>
+          </a:stretch>
+        </p:blipFill>
+        <p:spPr>
+          <a:xfrm>
+            <a:off x="-169307" y="0"/>
+            <a:ext cx="2381250" cy="2428875"/>
+          </a:xfrm>
+          <a:prstGeom prst="rect">
+            <a:avLst/>
+          </a:prstGeom>
+        </p:spPr>
+      </p:pic>
+      <p:pic>
+        <p:nvPicPr>
+          <p:cNvPr id="7" name="Immagine 6">
+            <a:extLst>
+              <a:ext uri="{FF2B5EF4-FFF2-40B4-BE49-F238E27FC236}">
+                <a16:creationId xmlns:a16="http://schemas.microsoft.com/office/drawing/2014/main" id="{05826335-B14C-B124-66B7-40ECA3A30B0A}"/>
+              </a:ext>
+            </a:extLst>
+          </p:cNvPr>
+          <p:cNvPicPr>
+            <a:picLocks noChangeAspect="1"/>
+          </p:cNvPicPr>
+          <p:nvPr/>
+        </p:nvPicPr>
+        <p:blipFill>
+          <a:blip r:embed="rId8"/>
+          <a:stretch>
+            <a:fillRect/>
+          </a:stretch>
+        </p:blipFill>
+        <p:spPr>
+          <a:xfrm>
+            <a:off x="750093" y="6338963"/>
+            <a:ext cx="7667625" cy="466725"/>
+          </a:xfrm>
+          <a:prstGeom prst="rect">
+            <a:avLst/>
+          </a:prstGeom>
+        </p:spPr>
+      </p:pic>
     </p:spTree>
   </p:cSld>
   <p:clrMapOvr>
@@ -37889,6 +38335,66 @@
           </a:graphicData>
         </a:graphic>
       </p:graphicFrame>
+      <p:pic>
+        <p:nvPicPr>
+          <p:cNvPr id="4" name="Immagine 3" descr="Immagine che contiene cerchio, Elementi grafici, design, schermata&#10;&#10;Il contenuto generato dall'IA potrebbe non essere corretto.">
+            <a:extLst>
+              <a:ext uri="{FF2B5EF4-FFF2-40B4-BE49-F238E27FC236}">
+                <a16:creationId xmlns:a16="http://schemas.microsoft.com/office/drawing/2014/main" id="{E7EE852E-E0D4-26D8-B1FB-C7D55A99122D}"/>
+              </a:ext>
+            </a:extLst>
+          </p:cNvPr>
+          <p:cNvPicPr>
+            <a:picLocks noChangeAspect="1"/>
+          </p:cNvPicPr>
+          <p:nvPr/>
+        </p:nvPicPr>
+        <p:blipFill>
+          <a:blip r:embed="rId7"/>
+          <a:stretch>
+            <a:fillRect/>
+          </a:stretch>
+        </p:blipFill>
+        <p:spPr>
+          <a:xfrm>
+            <a:off x="6721885" y="-71438"/>
+            <a:ext cx="2381250" cy="2428875"/>
+          </a:xfrm>
+          <a:prstGeom prst="rect">
+            <a:avLst/>
+          </a:prstGeom>
+        </p:spPr>
+      </p:pic>
+      <p:pic>
+        <p:nvPicPr>
+          <p:cNvPr id="7" name="Immagine 6">
+            <a:extLst>
+              <a:ext uri="{FF2B5EF4-FFF2-40B4-BE49-F238E27FC236}">
+                <a16:creationId xmlns:a16="http://schemas.microsoft.com/office/drawing/2014/main" id="{321653A8-86C9-4B5D-05F9-1412CBDD470C}"/>
+              </a:ext>
+            </a:extLst>
+          </p:cNvPr>
+          <p:cNvPicPr>
+            <a:picLocks noChangeAspect="1"/>
+          </p:cNvPicPr>
+          <p:nvPr/>
+        </p:nvPicPr>
+        <p:blipFill>
+          <a:blip r:embed="rId8"/>
+          <a:stretch>
+            <a:fillRect/>
+          </a:stretch>
+        </p:blipFill>
+        <p:spPr>
+          <a:xfrm>
+            <a:off x="738186" y="6285971"/>
+            <a:ext cx="7667625" cy="466725"/>
+          </a:xfrm>
+          <a:prstGeom prst="rect">
+            <a:avLst/>
+          </a:prstGeom>
+        </p:spPr>
+      </p:pic>
     </p:spTree>
   </p:cSld>
   <p:clrMapOvr>
@@ -39350,6 +39856,66 @@
           </a:p>
         </p:txBody>
       </p:sp>
+      <p:pic>
+        <p:nvPicPr>
+          <p:cNvPr id="4" name="Immagine 3" descr="Immagine che contiene cerchio, Elementi grafici, design, schermata&#10;&#10;Il contenuto generato dall'IA potrebbe non essere corretto.">
+            <a:extLst>
+              <a:ext uri="{FF2B5EF4-FFF2-40B4-BE49-F238E27FC236}">
+                <a16:creationId xmlns:a16="http://schemas.microsoft.com/office/drawing/2014/main" id="{02A63A81-F51B-959B-FC77-58F009BE9FF4}"/>
+              </a:ext>
+            </a:extLst>
+          </p:cNvPr>
+          <p:cNvPicPr>
+            <a:picLocks noChangeAspect="1"/>
+          </p:cNvPicPr>
+          <p:nvPr/>
+        </p:nvPicPr>
+        <p:blipFill>
+          <a:blip r:embed="rId8"/>
+          <a:stretch>
+            <a:fillRect/>
+          </a:stretch>
+        </p:blipFill>
+        <p:spPr>
+          <a:xfrm>
+            <a:off x="6894909" y="-18910"/>
+            <a:ext cx="2381250" cy="2428875"/>
+          </a:xfrm>
+          <a:prstGeom prst="rect">
+            <a:avLst/>
+          </a:prstGeom>
+        </p:spPr>
+      </p:pic>
+      <p:pic>
+        <p:nvPicPr>
+          <p:cNvPr id="7" name="Immagine 6">
+            <a:extLst>
+              <a:ext uri="{FF2B5EF4-FFF2-40B4-BE49-F238E27FC236}">
+                <a16:creationId xmlns:a16="http://schemas.microsoft.com/office/drawing/2014/main" id="{548246DF-B8B0-7914-DC88-E4DFC2CA0585}"/>
+              </a:ext>
+            </a:extLst>
+          </p:cNvPr>
+          <p:cNvPicPr>
+            <a:picLocks noChangeAspect="1"/>
+          </p:cNvPicPr>
+          <p:nvPr/>
+        </p:nvPicPr>
+        <p:blipFill>
+          <a:blip r:embed="rId9"/>
+          <a:stretch>
+            <a:fillRect/>
+          </a:stretch>
+        </p:blipFill>
+        <p:spPr>
+          <a:xfrm>
+            <a:off x="738187" y="6391275"/>
+            <a:ext cx="7667625" cy="466725"/>
+          </a:xfrm>
+          <a:prstGeom prst="rect">
+            <a:avLst/>
+          </a:prstGeom>
+        </p:spPr>
+      </p:pic>
     </p:spTree>
     <p:extLst>
       <p:ext uri="{BB962C8B-B14F-4D97-AF65-F5344CB8AC3E}">
@@ -40566,6 +41132,36 @@
           </a:p>
         </p:txBody>
       </p:sp>
+      <p:pic>
+        <p:nvPicPr>
+          <p:cNvPr id="4" name="Immagine 3" descr="Immagine che contiene cerchio, Elementi grafici, design, schermata&#10;&#10;Il contenuto generato dall'IA potrebbe non essere corretto.">
+            <a:extLst>
+              <a:ext uri="{FF2B5EF4-FFF2-40B4-BE49-F238E27FC236}">
+                <a16:creationId xmlns:a16="http://schemas.microsoft.com/office/drawing/2014/main" id="{5312A969-25DD-B59E-009A-D0310E356A28}"/>
+              </a:ext>
+            </a:extLst>
+          </p:cNvPr>
+          <p:cNvPicPr>
+            <a:picLocks noChangeAspect="1"/>
+          </p:cNvPicPr>
+          <p:nvPr/>
+        </p:nvPicPr>
+        <p:blipFill>
+          <a:blip r:embed="rId8"/>
+          <a:stretch>
+            <a:fillRect/>
+          </a:stretch>
+        </p:blipFill>
+        <p:spPr>
+          <a:xfrm>
+            <a:off x="6782456" y="-63817"/>
+            <a:ext cx="2381250" cy="2428875"/>
+          </a:xfrm>
+          <a:prstGeom prst="rect">
+            <a:avLst/>
+          </a:prstGeom>
+        </p:spPr>
+      </p:pic>
     </p:spTree>
     <p:extLst>
       <p:ext uri="{BB962C8B-B14F-4D97-AF65-F5344CB8AC3E}">
@@ -41749,6 +42345,66 @@
           </a:graphicData>
         </a:graphic>
       </p:graphicFrame>
+      <p:pic>
+        <p:nvPicPr>
+          <p:cNvPr id="4" name="Immagine 3" descr="Immagine che contiene cerchio, Elementi grafici, design, schermata&#10;&#10;Il contenuto generato dall'IA potrebbe non essere corretto.">
+            <a:extLst>
+              <a:ext uri="{FF2B5EF4-FFF2-40B4-BE49-F238E27FC236}">
+                <a16:creationId xmlns:a16="http://schemas.microsoft.com/office/drawing/2014/main" id="{D9632FF1-DBE1-BE6C-72A6-C7AD56F232B4}"/>
+              </a:ext>
+            </a:extLst>
+          </p:cNvPr>
+          <p:cNvPicPr>
+            <a:picLocks noChangeAspect="1"/>
+          </p:cNvPicPr>
+          <p:nvPr/>
+        </p:nvPicPr>
+        <p:blipFill>
+          <a:blip r:embed="rId7"/>
+          <a:stretch>
+            <a:fillRect/>
+          </a:stretch>
+        </p:blipFill>
+        <p:spPr>
+          <a:xfrm>
+            <a:off x="6894909" y="-142713"/>
+            <a:ext cx="2381250" cy="2428875"/>
+          </a:xfrm>
+          <a:prstGeom prst="rect">
+            <a:avLst/>
+          </a:prstGeom>
+        </p:spPr>
+      </p:pic>
+      <p:pic>
+        <p:nvPicPr>
+          <p:cNvPr id="7" name="Immagine 6">
+            <a:extLst>
+              <a:ext uri="{FF2B5EF4-FFF2-40B4-BE49-F238E27FC236}">
+                <a16:creationId xmlns:a16="http://schemas.microsoft.com/office/drawing/2014/main" id="{A89B68D6-7A58-EAFA-B73E-81CCBE676B3D}"/>
+              </a:ext>
+            </a:extLst>
+          </p:cNvPr>
+          <p:cNvPicPr>
+            <a:picLocks noChangeAspect="1"/>
+          </p:cNvPicPr>
+          <p:nvPr/>
+        </p:nvPicPr>
+        <p:blipFill>
+          <a:blip r:embed="rId8"/>
+          <a:stretch>
+            <a:fillRect/>
+          </a:stretch>
+        </p:blipFill>
+        <p:spPr>
+          <a:xfrm>
+            <a:off x="738187" y="6252857"/>
+            <a:ext cx="7667625" cy="466725"/>
+          </a:xfrm>
+          <a:prstGeom prst="rect">
+            <a:avLst/>
+          </a:prstGeom>
+        </p:spPr>
+      </p:pic>
     </p:spTree>
   </p:cSld>
   <p:clrMapOvr>
@@ -42174,6 +42830,66 @@
           </a:p>
         </p:txBody>
       </p:sp>
+      <p:pic>
+        <p:nvPicPr>
+          <p:cNvPr id="5" name="Immagine 4" descr="Immagine che contiene cerchio, Elementi grafici, design, schermata&#10;&#10;Il contenuto generato dall'IA potrebbe non essere corretto.">
+            <a:extLst>
+              <a:ext uri="{FF2B5EF4-FFF2-40B4-BE49-F238E27FC236}">
+                <a16:creationId xmlns:a16="http://schemas.microsoft.com/office/drawing/2014/main" id="{6541B832-109D-01C4-EFFC-5519D512A9F0}"/>
+              </a:ext>
+            </a:extLst>
+          </p:cNvPr>
+          <p:cNvPicPr>
+            <a:picLocks noChangeAspect="1"/>
+          </p:cNvPicPr>
+          <p:nvPr/>
+        </p:nvPicPr>
+        <p:blipFill>
+          <a:blip r:embed="rId4"/>
+          <a:stretch>
+            <a:fillRect/>
+          </a:stretch>
+        </p:blipFill>
+        <p:spPr>
+          <a:xfrm>
+            <a:off x="223783" y="425091"/>
+            <a:ext cx="2381250" cy="2428875"/>
+          </a:xfrm>
+          <a:prstGeom prst="rect">
+            <a:avLst/>
+          </a:prstGeom>
+        </p:spPr>
+      </p:pic>
+      <p:pic>
+        <p:nvPicPr>
+          <p:cNvPr id="7" name="Immagine 6">
+            <a:extLst>
+              <a:ext uri="{FF2B5EF4-FFF2-40B4-BE49-F238E27FC236}">
+                <a16:creationId xmlns:a16="http://schemas.microsoft.com/office/drawing/2014/main" id="{5D1D3DE3-2D02-6805-4A9B-469D400184F0}"/>
+              </a:ext>
+            </a:extLst>
+          </p:cNvPr>
+          <p:cNvPicPr>
+            <a:picLocks noChangeAspect="1"/>
+          </p:cNvPicPr>
+          <p:nvPr/>
+        </p:nvPicPr>
+        <p:blipFill>
+          <a:blip r:embed="rId5"/>
+          <a:stretch>
+            <a:fillRect/>
+          </a:stretch>
+        </p:blipFill>
+        <p:spPr>
+          <a:xfrm>
+            <a:off x="738187" y="6266847"/>
+            <a:ext cx="7667625" cy="466725"/>
+          </a:xfrm>
+          <a:prstGeom prst="rect">
+            <a:avLst/>
+          </a:prstGeom>
+        </p:spPr>
+      </p:pic>
     </p:spTree>
   </p:cSld>
   <p:clrMapOvr>
@@ -42614,6 +43330,66 @@
           </a:p>
         </p:txBody>
       </p:sp>
+      <p:pic>
+        <p:nvPicPr>
+          <p:cNvPr id="5" name="Immagine 4" descr="Immagine che contiene cerchio, Elementi grafici, design, schermata&#10;&#10;Il contenuto generato dall'IA potrebbe non essere corretto.">
+            <a:extLst>
+              <a:ext uri="{FF2B5EF4-FFF2-40B4-BE49-F238E27FC236}">
+                <a16:creationId xmlns:a16="http://schemas.microsoft.com/office/drawing/2014/main" id="{561D9DED-C510-05DE-7AC8-9AE8CB2BB207}"/>
+              </a:ext>
+            </a:extLst>
+          </p:cNvPr>
+          <p:cNvPicPr>
+            <a:picLocks noChangeAspect="1"/>
+          </p:cNvPicPr>
+          <p:nvPr/>
+        </p:nvPicPr>
+        <p:blipFill>
+          <a:blip r:embed="rId4"/>
+          <a:stretch>
+            <a:fillRect/>
+          </a:stretch>
+        </p:blipFill>
+        <p:spPr>
+          <a:xfrm>
+            <a:off x="223783" y="533246"/>
+            <a:ext cx="2381250" cy="2428875"/>
+          </a:xfrm>
+          <a:prstGeom prst="rect">
+            <a:avLst/>
+          </a:prstGeom>
+        </p:spPr>
+      </p:pic>
+      <p:pic>
+        <p:nvPicPr>
+          <p:cNvPr id="7" name="Immagine 6">
+            <a:extLst>
+              <a:ext uri="{FF2B5EF4-FFF2-40B4-BE49-F238E27FC236}">
+                <a16:creationId xmlns:a16="http://schemas.microsoft.com/office/drawing/2014/main" id="{AE7C2662-A4DA-7A06-2550-3BD58A1DF556}"/>
+              </a:ext>
+            </a:extLst>
+          </p:cNvPr>
+          <p:cNvPicPr>
+            <a:picLocks noChangeAspect="1"/>
+          </p:cNvPicPr>
+          <p:nvPr/>
+        </p:nvPicPr>
+        <p:blipFill>
+          <a:blip r:embed="rId5"/>
+          <a:stretch>
+            <a:fillRect/>
+          </a:stretch>
+        </p:blipFill>
+        <p:spPr>
+          <a:xfrm>
+            <a:off x="736996" y="6292799"/>
+            <a:ext cx="7667625" cy="466725"/>
+          </a:xfrm>
+          <a:prstGeom prst="rect">
+            <a:avLst/>
+          </a:prstGeom>
+        </p:spPr>
+      </p:pic>
     </p:spTree>
   </p:cSld>
   <p:clrMapOvr>
@@ -43044,6 +43820,36 @@
           </a:p>
         </p:txBody>
       </p:sp>
+      <p:pic>
+        <p:nvPicPr>
+          <p:cNvPr id="5" name="Immagine 4" descr="Immagine che contiene cerchio, Elementi grafici, design, schermata&#10;&#10;Il contenuto generato dall'IA potrebbe non essere corretto.">
+            <a:extLst>
+              <a:ext uri="{FF2B5EF4-FFF2-40B4-BE49-F238E27FC236}">
+                <a16:creationId xmlns:a16="http://schemas.microsoft.com/office/drawing/2014/main" id="{19FC9CEE-2A8D-9C1B-87E2-6148E0053F89}"/>
+              </a:ext>
+            </a:extLst>
+          </p:cNvPr>
+          <p:cNvPicPr>
+            <a:picLocks noChangeAspect="1"/>
+          </p:cNvPicPr>
+          <p:nvPr/>
+        </p:nvPicPr>
+        <p:blipFill>
+          <a:blip r:embed="rId4"/>
+          <a:stretch>
+            <a:fillRect/>
+          </a:stretch>
+        </p:blipFill>
+        <p:spPr>
+          <a:xfrm>
+            <a:off x="223783" y="434924"/>
+            <a:ext cx="2381250" cy="2428875"/>
+          </a:xfrm>
+          <a:prstGeom prst="rect">
+            <a:avLst/>
+          </a:prstGeom>
+        </p:spPr>
+      </p:pic>
     </p:spTree>
   </p:cSld>
   <p:clrMapOvr>

--- a/Slide_Teoriche_Classi_JS.pptx
+++ b/Slide_Teoriche_Classi_JS.pptx
@@ -37254,6 +37254,18 @@
   <p:clrMapOvr>
     <a:overrideClrMapping bg1="lt1" tx1="dk1" bg2="lt2" tx2="dk2" accent1="accent1" accent2="accent2" accent3="accent3" accent4="accent4" accent5="accent5" accent6="accent6" hlink="hlink" folHlink="folHlink"/>
   </p:clrMapOvr>
+  <mc:AlternateContent xmlns:mc="http://schemas.openxmlformats.org/markup-compatibility/2006">
+    <mc:Choice xmlns:p14="http://schemas.microsoft.com/office/powerpoint/2010/main" Requires="p14">
+      <p:transition spd="med" p14:dur="700">
+        <p:fade/>
+      </p:transition>
+    </mc:Choice>
+    <mc:Fallback>
+      <p:transition spd="med">
+        <p:fade/>
+      </p:transition>
+    </mc:Fallback>
+  </mc:AlternateContent>
 </p:sld>
 </file>
 

--- a/Slide_Teoriche_Classi_JS.pptx
+++ b/Slide_Teoriche_Classi_JS.pptx
@@ -19020,7 +19020,7 @@
           <a:p>
             <a:fld id="{5BCAD085-E8A6-8845-BD4E-CB4CCA059FC4}" type="datetimeFigureOut">
               <a:rPr lang="en-US" smtClean="0"/>
-              <a:t>6/27/2025</a:t>
+              <a:t>7/1/2025</a:t>
             </a:fld>
             <a:endParaRPr lang="en-US"/>
           </a:p>
@@ -19295,7 +19295,7 @@
           <a:p>
             <a:fld id="{5BCAD085-E8A6-8845-BD4E-CB4CCA059FC4}" type="datetimeFigureOut">
               <a:rPr lang="en-US" smtClean="0"/>
-              <a:t>6/27/2025</a:t>
+              <a:t>7/1/2025</a:t>
             </a:fld>
             <a:endParaRPr lang="en-US"/>
           </a:p>
@@ -19489,7 +19489,7 @@
           <a:p>
             <a:fld id="{5BCAD085-E8A6-8845-BD4E-CB4CCA059FC4}" type="datetimeFigureOut">
               <a:rPr lang="en-US" smtClean="0"/>
-              <a:t>6/27/2025</a:t>
+              <a:t>7/1/2025</a:t>
             </a:fld>
             <a:endParaRPr lang="en-US"/>
           </a:p>
@@ -19762,7 +19762,7 @@
           <a:p>
             <a:fld id="{5BCAD085-E8A6-8845-BD4E-CB4CCA059FC4}" type="datetimeFigureOut">
               <a:rPr lang="en-US" smtClean="0"/>
-              <a:t>6/27/2025</a:t>
+              <a:t>7/1/2025</a:t>
             </a:fld>
             <a:endParaRPr lang="en-US"/>
           </a:p>
@@ -20103,7 +20103,7 @@
           <a:p>
             <a:fld id="{5BCAD085-E8A6-8845-BD4E-CB4CCA059FC4}" type="datetimeFigureOut">
               <a:rPr lang="en-US" smtClean="0"/>
-              <a:t>6/27/2025</a:t>
+              <a:t>7/1/2025</a:t>
             </a:fld>
             <a:endParaRPr lang="en-US"/>
           </a:p>
@@ -20726,7 +20726,7 @@
           <a:p>
             <a:fld id="{5BCAD085-E8A6-8845-BD4E-CB4CCA059FC4}" type="datetimeFigureOut">
               <a:rPr lang="en-US" smtClean="0"/>
-              <a:t>6/27/2025</a:t>
+              <a:t>7/1/2025</a:t>
             </a:fld>
             <a:endParaRPr lang="en-US"/>
           </a:p>
@@ -21586,7 +21586,7 @@
           <a:p>
             <a:fld id="{5BCAD085-E8A6-8845-BD4E-CB4CCA059FC4}" type="datetimeFigureOut">
               <a:rPr lang="en-US" smtClean="0"/>
-              <a:t>6/27/2025</a:t>
+              <a:t>7/1/2025</a:t>
             </a:fld>
             <a:endParaRPr lang="en-US"/>
           </a:p>
@@ -21756,7 +21756,7 @@
           <a:p>
             <a:fld id="{5BCAD085-E8A6-8845-BD4E-CB4CCA059FC4}" type="datetimeFigureOut">
               <a:rPr lang="en-US" smtClean="0"/>
-              <a:t>6/27/2025</a:t>
+              <a:t>7/1/2025</a:t>
             </a:fld>
             <a:endParaRPr lang="en-US"/>
           </a:p>
@@ -21936,7 +21936,7 @@
           <a:p>
             <a:fld id="{5BCAD085-E8A6-8845-BD4E-CB4CCA059FC4}" type="datetimeFigureOut">
               <a:rPr lang="en-US" smtClean="0"/>
-              <a:t>6/27/2025</a:t>
+              <a:t>7/1/2025</a:t>
             </a:fld>
             <a:endParaRPr lang="en-US"/>
           </a:p>
@@ -22183,7 +22183,7 @@
           <a:p>
             <a:fld id="{5BCAD085-E8A6-8845-BD4E-CB4CCA059FC4}" type="datetimeFigureOut">
               <a:rPr lang="en-US" smtClean="0"/>
-              <a:t>6/27/2025</a:t>
+              <a:t>7/1/2025</a:t>
             </a:fld>
             <a:endParaRPr lang="en-US"/>
           </a:p>
@@ -22353,7 +22353,7 @@
           <a:p>
             <a:fld id="{5BCAD085-E8A6-8845-BD4E-CB4CCA059FC4}" type="datetimeFigureOut">
               <a:rPr lang="en-US" smtClean="0"/>
-              <a:t>6/27/2025</a:t>
+              <a:t>7/1/2025</a:t>
             </a:fld>
             <a:endParaRPr lang="en-US"/>
           </a:p>
@@ -22523,7 +22523,7 @@
           <a:p>
             <a:fld id="{5BCAD085-E8A6-8845-BD4E-CB4CCA059FC4}" type="datetimeFigureOut">
               <a:rPr lang="en-US" smtClean="0"/>
-              <a:t>6/27/2025</a:t>
+              <a:t>7/1/2025</a:t>
             </a:fld>
             <a:endParaRPr lang="en-US"/>
           </a:p>
@@ -22770,7 +22770,7 @@
           <a:p>
             <a:fld id="{5BCAD085-E8A6-8845-BD4E-CB4CCA059FC4}" type="datetimeFigureOut">
               <a:rPr lang="en-US" smtClean="0"/>
-              <a:t>6/27/2025</a:t>
+              <a:t>7/1/2025</a:t>
             </a:fld>
             <a:endParaRPr lang="en-US"/>
           </a:p>
@@ -23062,7 +23062,7 @@
           <a:p>
             <a:fld id="{5BCAD085-E8A6-8845-BD4E-CB4CCA059FC4}" type="datetimeFigureOut">
               <a:rPr lang="en-US" smtClean="0"/>
-              <a:t>6/27/2025</a:t>
+              <a:t>7/1/2025</a:t>
             </a:fld>
             <a:endParaRPr lang="en-US"/>
           </a:p>
@@ -23506,7 +23506,7 @@
           <a:p>
             <a:fld id="{5BCAD085-E8A6-8845-BD4E-CB4CCA059FC4}" type="datetimeFigureOut">
               <a:rPr lang="en-US" smtClean="0"/>
-              <a:t>6/27/2025</a:t>
+              <a:t>7/1/2025</a:t>
             </a:fld>
             <a:endParaRPr lang="en-US"/>
           </a:p>
@@ -23624,7 +23624,7 @@
           <a:p>
             <a:fld id="{5BCAD085-E8A6-8845-BD4E-CB4CCA059FC4}" type="datetimeFigureOut">
               <a:rPr lang="en-US" smtClean="0"/>
-              <a:t>6/27/2025</a:t>
+              <a:t>7/1/2025</a:t>
             </a:fld>
             <a:endParaRPr lang="en-US"/>
           </a:p>
@@ -23719,7 +23719,7 @@
           <a:p>
             <a:fld id="{5BCAD085-E8A6-8845-BD4E-CB4CCA059FC4}" type="datetimeFigureOut">
               <a:rPr lang="en-US" smtClean="0"/>
-              <a:t>6/27/2025</a:t>
+              <a:t>7/1/2025</a:t>
             </a:fld>
             <a:endParaRPr lang="en-US"/>
           </a:p>
@@ -23998,7 +23998,7 @@
           <a:p>
             <a:fld id="{5BCAD085-E8A6-8845-BD4E-CB4CCA059FC4}" type="datetimeFigureOut">
               <a:rPr lang="en-US" smtClean="0"/>
-              <a:t>6/27/2025</a:t>
+              <a:t>7/1/2025</a:t>
             </a:fld>
             <a:endParaRPr lang="en-US"/>
           </a:p>
@@ -24273,7 +24273,7 @@
           <a:p>
             <a:fld id="{5BCAD085-E8A6-8845-BD4E-CB4CCA059FC4}" type="datetimeFigureOut">
               <a:rPr lang="en-US" smtClean="0"/>
-              <a:t>6/27/2025</a:t>
+              <a:t>7/1/2025</a:t>
             </a:fld>
             <a:endParaRPr lang="en-US"/>
           </a:p>
@@ -24548,7 +24548,7 @@
           <a:p>
             <a:fld id="{5BCAD085-E8A6-8845-BD4E-CB4CCA059FC4}" type="datetimeFigureOut">
               <a:rPr lang="en-US" smtClean="0"/>
-              <a:t>6/27/2025</a:t>
+              <a:t>7/1/2025</a:t>
             </a:fld>
             <a:endParaRPr lang="en-US"/>
           </a:p>
@@ -24742,7 +24742,7 @@
           <a:p>
             <a:fld id="{5BCAD085-E8A6-8845-BD4E-CB4CCA059FC4}" type="datetimeFigureOut">
               <a:rPr lang="en-US" smtClean="0"/>
-              <a:t>6/27/2025</a:t>
+              <a:t>7/1/2025</a:t>
             </a:fld>
             <a:endParaRPr lang="en-US"/>
           </a:p>
@@ -25015,7 +25015,7 @@
           <a:p>
             <a:fld id="{5BCAD085-E8A6-8845-BD4E-CB4CCA059FC4}" type="datetimeFigureOut">
               <a:rPr lang="en-US" smtClean="0"/>
-              <a:t>6/27/2025</a:t>
+              <a:t>7/1/2025</a:t>
             </a:fld>
             <a:endParaRPr lang="en-US"/>
           </a:p>
@@ -25356,7 +25356,7 @@
           <a:p>
             <a:fld id="{5BCAD085-E8A6-8845-BD4E-CB4CCA059FC4}" type="datetimeFigureOut">
               <a:rPr lang="en-US" smtClean="0"/>
-              <a:t>6/27/2025</a:t>
+              <a:t>7/1/2025</a:t>
             </a:fld>
             <a:endParaRPr lang="en-US"/>
           </a:p>
@@ -25603,7 +25603,7 @@
           <a:p>
             <a:fld id="{5BCAD085-E8A6-8845-BD4E-CB4CCA059FC4}" type="datetimeFigureOut">
               <a:rPr lang="en-US" smtClean="0"/>
-              <a:t>6/27/2025</a:t>
+              <a:t>7/1/2025</a:t>
             </a:fld>
             <a:endParaRPr lang="en-US"/>
           </a:p>
@@ -26226,7 +26226,7 @@
           <a:p>
             <a:fld id="{5BCAD085-E8A6-8845-BD4E-CB4CCA059FC4}" type="datetimeFigureOut">
               <a:rPr lang="en-US" smtClean="0"/>
-              <a:t>6/27/2025</a:t>
+              <a:t>7/1/2025</a:t>
             </a:fld>
             <a:endParaRPr lang="en-US"/>
           </a:p>
@@ -27086,7 +27086,7 @@
           <a:p>
             <a:fld id="{5BCAD085-E8A6-8845-BD4E-CB4CCA059FC4}" type="datetimeFigureOut">
               <a:rPr lang="en-US" smtClean="0"/>
-              <a:t>6/27/2025</a:t>
+              <a:t>7/1/2025</a:t>
             </a:fld>
             <a:endParaRPr lang="en-US"/>
           </a:p>
@@ -27256,7 +27256,7 @@
           <a:p>
             <a:fld id="{5BCAD085-E8A6-8845-BD4E-CB4CCA059FC4}" type="datetimeFigureOut">
               <a:rPr lang="en-US" smtClean="0"/>
-              <a:t>6/27/2025</a:t>
+              <a:t>7/1/2025</a:t>
             </a:fld>
             <a:endParaRPr lang="en-US"/>
           </a:p>
@@ -27436,7 +27436,7 @@
           <a:p>
             <a:fld id="{5BCAD085-E8A6-8845-BD4E-CB4CCA059FC4}" type="datetimeFigureOut">
               <a:rPr lang="en-US" smtClean="0"/>
-              <a:t>6/27/2025</a:t>
+              <a:t>7/1/2025</a:t>
             </a:fld>
             <a:endParaRPr lang="en-US"/>
           </a:p>
@@ -27728,7 +27728,7 @@
           <a:p>
             <a:fld id="{5BCAD085-E8A6-8845-BD4E-CB4CCA059FC4}" type="datetimeFigureOut">
               <a:rPr lang="en-US" smtClean="0"/>
-              <a:t>6/27/2025</a:t>
+              <a:t>7/1/2025</a:t>
             </a:fld>
             <a:endParaRPr lang="en-US"/>
           </a:p>
@@ -28172,7 +28172,7 @@
           <a:p>
             <a:fld id="{5BCAD085-E8A6-8845-BD4E-CB4CCA059FC4}" type="datetimeFigureOut">
               <a:rPr lang="en-US" smtClean="0"/>
-              <a:t>6/27/2025</a:t>
+              <a:t>7/1/2025</a:t>
             </a:fld>
             <a:endParaRPr lang="en-US"/>
           </a:p>
@@ -28290,7 +28290,7 @@
           <a:p>
             <a:fld id="{5BCAD085-E8A6-8845-BD4E-CB4CCA059FC4}" type="datetimeFigureOut">
               <a:rPr lang="en-US" smtClean="0"/>
-              <a:t>6/27/2025</a:t>
+              <a:t>7/1/2025</a:t>
             </a:fld>
             <a:endParaRPr lang="en-US"/>
           </a:p>
@@ -28385,7 +28385,7 @@
           <a:p>
             <a:fld id="{5BCAD085-E8A6-8845-BD4E-CB4CCA059FC4}" type="datetimeFigureOut">
               <a:rPr lang="en-US" smtClean="0"/>
-              <a:t>6/27/2025</a:t>
+              <a:t>7/1/2025</a:t>
             </a:fld>
             <a:endParaRPr lang="en-US"/>
           </a:p>
@@ -28664,7 +28664,7 @@
           <a:p>
             <a:fld id="{5BCAD085-E8A6-8845-BD4E-CB4CCA059FC4}" type="datetimeFigureOut">
               <a:rPr lang="en-US" smtClean="0"/>
-              <a:t>6/27/2025</a:t>
+              <a:t>7/1/2025</a:t>
             </a:fld>
             <a:endParaRPr lang="en-US"/>
           </a:p>
@@ -28939,7 +28939,7 @@
           <a:p>
             <a:fld id="{5BCAD085-E8A6-8845-BD4E-CB4CCA059FC4}" type="datetimeFigureOut">
               <a:rPr lang="en-US" smtClean="0"/>
-              <a:t>6/27/2025</a:t>
+              <a:t>7/1/2025</a:t>
             </a:fld>
             <a:endParaRPr lang="en-US"/>
           </a:p>
@@ -29189,7 +29189,7 @@
           <a:p>
             <a:fld id="{5BCAD085-E8A6-8845-BD4E-CB4CCA059FC4}" type="datetimeFigureOut">
               <a:rPr lang="en-US" smtClean="0"/>
-              <a:t>6/27/2025</a:t>
+              <a:t>7/1/2025</a:t>
             </a:fld>
             <a:endParaRPr lang="en-US"/>
           </a:p>
@@ -30204,7 +30204,7 @@
           <a:p>
             <a:fld id="{5BCAD085-E8A6-8845-BD4E-CB4CCA059FC4}" type="datetimeFigureOut">
               <a:rPr lang="en-US" smtClean="0"/>
-              <a:t>6/27/2025</a:t>
+              <a:t>7/1/2025</a:t>
             </a:fld>
             <a:endParaRPr lang="en-US"/>
           </a:p>
@@ -31176,7 +31176,7 @@
         </p:nvSpPr>
         <p:spPr>
           <a:xfrm>
-            <a:off x="486697" y="629267"/>
+            <a:off x="486697" y="933326"/>
             <a:ext cx="6939116" cy="1016654"/>
           </a:xfrm>
         </p:spPr>
@@ -31187,7 +31187,7 @@
           <a:lstStyle/>
           <a:p>
             <a:r>
-              <a:rPr lang="en-GB">
+              <a:rPr lang="en-GB" dirty="0">
                 <a:solidFill>
                   <a:srgbClr val="EBEBEB"/>
                 </a:solidFill>
@@ -31778,13 +31778,13 @@
             <p:ph idx="1"/>
             <p:extLst>
               <p:ext uri="{D42A27DB-BD31-4B8C-83A1-F6EECF244321}">
-                <p14:modId xmlns:p14="http://schemas.microsoft.com/office/powerpoint/2010/main" val="2921828215"/>
+                <p14:modId xmlns:p14="http://schemas.microsoft.com/office/powerpoint/2010/main" val="1048097476"/>
               </p:ext>
             </p:extLst>
           </p:nvPr>
         </p:nvGraphicFramePr>
         <p:xfrm>
-          <a:off x="486697" y="2810256"/>
+          <a:off x="486697" y="2428875"/>
           <a:ext cx="8171528" cy="3404277"/>
         </p:xfrm>
         <a:graphic>
@@ -31847,6 +31847,36 @@
           <a:xfrm>
             <a:off x="675084" y="6302904"/>
             <a:ext cx="7667625" cy="466725"/>
+          </a:xfrm>
+          <a:prstGeom prst="rect">
+            <a:avLst/>
+          </a:prstGeom>
+        </p:spPr>
+      </p:pic>
+      <p:pic>
+        <p:nvPicPr>
+          <p:cNvPr id="4" name="Immagine 3">
+            <a:extLst>
+              <a:ext uri="{FF2B5EF4-FFF2-40B4-BE49-F238E27FC236}">
+                <a16:creationId xmlns:a16="http://schemas.microsoft.com/office/drawing/2014/main" id="{50C8D4BF-6595-20FD-6178-96C25EFF21FD}"/>
+              </a:ext>
+            </a:extLst>
+          </p:cNvPr>
+          <p:cNvPicPr>
+            <a:picLocks noChangeAspect="1"/>
+          </p:cNvPicPr>
+          <p:nvPr/>
+        </p:nvPicPr>
+        <p:blipFill>
+          <a:blip r:embed="rId9"/>
+          <a:stretch>
+            <a:fillRect/>
+          </a:stretch>
+        </p:blipFill>
+        <p:spPr>
+          <a:xfrm>
+            <a:off x="0" y="11333"/>
+            <a:ext cx="7316221" cy="685896"/>
           </a:xfrm>
           <a:prstGeom prst="rect">
             <a:avLst/>
@@ -33320,7 +33350,7 @@
         </p:nvSpPr>
         <p:spPr>
           <a:xfrm>
-            <a:off x="486697" y="629267"/>
+            <a:off x="486697" y="951903"/>
             <a:ext cx="6939116" cy="1016654"/>
           </a:xfrm>
         </p:spPr>
@@ -33336,12 +33366,1246 @@
               </a:lnSpc>
             </a:pPr>
             <a:r>
-              <a:rPr lang="en-GB" sz="3600">
+              <a:rPr lang="en-GB" sz="3600" dirty="0">
                 <a:solidFill>
                   <a:srgbClr val="EBEBEB"/>
                 </a:solidFill>
               </a:rPr>
-              <a:t>Getter, Setter, Metodi Statici</a:t>
+              <a:t>Getter, Setter, Metodi </a:t>
+            </a:r>
+            <a:r>
+              <a:rPr lang="en-GB" sz="3600" dirty="0" err="1">
+                <a:solidFill>
+                  <a:srgbClr val="EBEBEB"/>
+                </a:solidFill>
+              </a:rPr>
+              <a:t>Statici</a:t>
+            </a:r>
+            <a:endParaRPr lang="en-GB" sz="3600" dirty="0">
+              <a:solidFill>
+                <a:srgbClr val="EBEBEB"/>
+              </a:solidFill>
+            </a:endParaRPr>
+          </a:p>
+        </p:txBody>
+      </p:sp>
+      <p:sp>
+        <p:nvSpPr>
+          <p:cNvPr id="13" name="Rectangle 12">
+            <a:extLst>
+              <a:ext uri="{FF2B5EF4-FFF2-40B4-BE49-F238E27FC236}">
+                <a16:creationId xmlns:a16="http://schemas.microsoft.com/office/drawing/2014/main" id="{12F7E335-851A-4CAE-B09F-E657819D4600}"/>
+              </a:ext>
+              <a:ext uri="{C183D7F6-B498-43B3-948B-1728B52AA6E4}">
+                <adec:decorative xmlns:adec="http://schemas.microsoft.com/office/drawing/2017/decorative" val="1"/>
+              </a:ext>
+            </a:extLst>
+          </p:cNvPr>
+          <p:cNvSpPr>
+            <a:spLocks noGrp="1" noRot="1" noChangeAspect="1" noMove="1" noResize="1" noEditPoints="1" noAdjustHandles="1" noChangeArrowheads="1" noChangeShapeType="1" noTextEdit="1"/>
+          </p:cNvSpPr>
+          <p:nvPr>
+            <p:extLst>
+              <p:ext uri="{386F3935-93C4-4BCD-93E2-E3B085C9AB24}">
+                <p16:designElem xmlns:p16="http://schemas.microsoft.com/office/powerpoint/2015/main" val="1"/>
+              </p:ext>
+            </p:extLst>
+          </p:nvPr>
+        </p:nvSpPr>
+        <p:spPr>
+          <a:xfrm>
+            <a:off x="7828359" y="0"/>
+            <a:ext cx="514350" cy="1143000"/>
+          </a:xfrm>
+          <a:prstGeom prst="rect">
+            <a:avLst/>
+          </a:prstGeom>
+          <a:solidFill>
+            <a:schemeClr val="accent1"/>
+          </a:solidFill>
+          <a:ln>
+            <a:noFill/>
+          </a:ln>
+        </p:spPr>
+        <p:style>
+          <a:lnRef idx="1">
+            <a:schemeClr val="accent1"/>
+          </a:lnRef>
+          <a:fillRef idx="3">
+            <a:schemeClr val="accent1"/>
+          </a:fillRef>
+          <a:effectRef idx="2">
+            <a:schemeClr val="accent1"/>
+          </a:effectRef>
+          <a:fontRef idx="minor">
+            <a:schemeClr val="lt1"/>
+          </a:fontRef>
+        </p:style>
+        <p:txBody>
+          <a:bodyPr/>
+          <a:lstStyle/>
+          <a:p>
+            <a:endParaRPr lang="en-GB"/>
+          </a:p>
+        </p:txBody>
+      </p:sp>
+      <p:sp>
+        <p:nvSpPr>
+          <p:cNvPr id="15" name="Freeform: Shape 14">
+            <a:extLst>
+              <a:ext uri="{FF2B5EF4-FFF2-40B4-BE49-F238E27FC236}">
+                <a16:creationId xmlns:a16="http://schemas.microsoft.com/office/drawing/2014/main" id="{10B541F0-7F6E-402E-84D8-CF96EACA5FBC}"/>
+              </a:ext>
+              <a:ext uri="{C183D7F6-B498-43B3-948B-1728B52AA6E4}">
+                <adec:decorative xmlns:adec="http://schemas.microsoft.com/office/drawing/2017/decorative" val="1"/>
+              </a:ext>
+            </a:extLst>
+          </p:cNvPr>
+          <p:cNvSpPr>
+            <a:spLocks noGrp="1" noRot="1" noChangeAspect="1" noMove="1" noResize="1" noEditPoints="1" noAdjustHandles="1" noChangeArrowheads="1" noChangeShapeType="1" noTextEdit="1"/>
+          </p:cNvSpPr>
+          <p:nvPr>
+            <p:extLst>
+              <p:ext uri="{386F3935-93C4-4BCD-93E2-E3B085C9AB24}">
+                <p16:designElem xmlns:p16="http://schemas.microsoft.com/office/powerpoint/2015/main" val="1"/>
+              </p:ext>
+            </p:extLst>
+          </p:nvPr>
+        </p:nvSpPr>
+        <p:spPr bwMode="gray">
+          <a:xfrm>
+            <a:off x="0" y="1762067"/>
+            <a:ext cx="9144312" cy="5095933"/>
+          </a:xfrm>
+          <a:custGeom>
+            <a:avLst/>
+            <a:gdLst>
+              <a:gd name="connsiteX0" fmla="*/ 1 w 12192418"/>
+              <a:gd name="connsiteY0" fmla="*/ 0 h 5095933"/>
+              <a:gd name="connsiteX1" fmla="*/ 71932 w 12192418"/>
+              <a:gd name="connsiteY1" fmla="*/ 12261 h 5095933"/>
+              <a:gd name="connsiteX2" fmla="*/ 282849 w 12192418"/>
+              <a:gd name="connsiteY2" fmla="*/ 48343 h 5095933"/>
+              <a:gd name="connsiteX3" fmla="*/ 436464 w 12192418"/>
+              <a:gd name="connsiteY3" fmla="*/ 73565 h 5095933"/>
+              <a:gd name="connsiteX4" fmla="*/ 619339 w 12192418"/>
+              <a:gd name="connsiteY4" fmla="*/ 100188 h 5095933"/>
+              <a:gd name="connsiteX5" fmla="*/ 836351 w 12192418"/>
+              <a:gd name="connsiteY5" fmla="*/ 132066 h 5095933"/>
+              <a:gd name="connsiteX6" fmla="*/ 1076528 w 12192418"/>
+              <a:gd name="connsiteY6" fmla="*/ 165696 h 5095933"/>
+              <a:gd name="connsiteX7" fmla="*/ 1347184 w 12192418"/>
+              <a:gd name="connsiteY7" fmla="*/ 201077 h 5095933"/>
+              <a:gd name="connsiteX8" fmla="*/ 1642223 w 12192418"/>
+              <a:gd name="connsiteY8" fmla="*/ 238560 h 5095933"/>
+              <a:gd name="connsiteX9" fmla="*/ 1962864 w 12192418"/>
+              <a:gd name="connsiteY9" fmla="*/ 276043 h 5095933"/>
+              <a:gd name="connsiteX10" fmla="*/ 2304232 w 12192418"/>
+              <a:gd name="connsiteY10" fmla="*/ 314227 h 5095933"/>
+              <a:gd name="connsiteX11" fmla="*/ 2672421 w 12192418"/>
+              <a:gd name="connsiteY11" fmla="*/ 349608 h 5095933"/>
+              <a:gd name="connsiteX12" fmla="*/ 3057678 w 12192418"/>
+              <a:gd name="connsiteY12" fmla="*/ 383588 h 5095933"/>
+              <a:gd name="connsiteX13" fmla="*/ 3464881 w 12192418"/>
+              <a:gd name="connsiteY13" fmla="*/ 414415 h 5095933"/>
+              <a:gd name="connsiteX14" fmla="*/ 3889152 w 12192418"/>
+              <a:gd name="connsiteY14" fmla="*/ 443841 h 5095933"/>
+              <a:gd name="connsiteX15" fmla="*/ 4331710 w 12192418"/>
+              <a:gd name="connsiteY15" fmla="*/ 471515 h 5095933"/>
+              <a:gd name="connsiteX16" fmla="*/ 4558476 w 12192418"/>
+              <a:gd name="connsiteY16" fmla="*/ 481324 h 5095933"/>
+              <a:gd name="connsiteX17" fmla="*/ 4790118 w 12192418"/>
+              <a:gd name="connsiteY17" fmla="*/ 492183 h 5095933"/>
+              <a:gd name="connsiteX18" fmla="*/ 5025418 w 12192418"/>
+              <a:gd name="connsiteY18" fmla="*/ 502342 h 5095933"/>
+              <a:gd name="connsiteX19" fmla="*/ 5261937 w 12192418"/>
+              <a:gd name="connsiteY19" fmla="*/ 508998 h 5095933"/>
+              <a:gd name="connsiteX20" fmla="*/ 5503332 w 12192418"/>
+              <a:gd name="connsiteY20" fmla="*/ 514953 h 5095933"/>
+              <a:gd name="connsiteX21" fmla="*/ 5747167 w 12192418"/>
+              <a:gd name="connsiteY21" fmla="*/ 521259 h 5095933"/>
+              <a:gd name="connsiteX22" fmla="*/ 5995877 w 12192418"/>
+              <a:gd name="connsiteY22" fmla="*/ 525463 h 5095933"/>
+              <a:gd name="connsiteX23" fmla="*/ 6247026 w 12192418"/>
+              <a:gd name="connsiteY23" fmla="*/ 525463 h 5095933"/>
+              <a:gd name="connsiteX24" fmla="*/ 6500613 w 12192418"/>
+              <a:gd name="connsiteY24" fmla="*/ 527565 h 5095933"/>
+              <a:gd name="connsiteX25" fmla="*/ 6756639 w 12192418"/>
+              <a:gd name="connsiteY25" fmla="*/ 525463 h 5095933"/>
+              <a:gd name="connsiteX26" fmla="*/ 7016322 w 12192418"/>
+              <a:gd name="connsiteY26" fmla="*/ 521259 h 5095933"/>
+              <a:gd name="connsiteX27" fmla="*/ 7276005 w 12192418"/>
+              <a:gd name="connsiteY27" fmla="*/ 517406 h 5095933"/>
+              <a:gd name="connsiteX28" fmla="*/ 7539345 w 12192418"/>
+              <a:gd name="connsiteY28" fmla="*/ 508998 h 5095933"/>
+              <a:gd name="connsiteX29" fmla="*/ 7805124 w 12192418"/>
+              <a:gd name="connsiteY29" fmla="*/ 500241 h 5095933"/>
+              <a:gd name="connsiteX30" fmla="*/ 8070903 w 12192418"/>
+              <a:gd name="connsiteY30" fmla="*/ 490082 h 5095933"/>
+              <a:gd name="connsiteX31" fmla="*/ 8339121 w 12192418"/>
+              <a:gd name="connsiteY31" fmla="*/ 475719 h 5095933"/>
+              <a:gd name="connsiteX32" fmla="*/ 8609776 w 12192418"/>
+              <a:gd name="connsiteY32" fmla="*/ 458554 h 5095933"/>
+              <a:gd name="connsiteX33" fmla="*/ 8881651 w 12192418"/>
+              <a:gd name="connsiteY33" fmla="*/ 442089 h 5095933"/>
+              <a:gd name="connsiteX34" fmla="*/ 9153526 w 12192418"/>
+              <a:gd name="connsiteY34" fmla="*/ 421071 h 5095933"/>
+              <a:gd name="connsiteX35" fmla="*/ 9429058 w 12192418"/>
+              <a:gd name="connsiteY35" fmla="*/ 395849 h 5095933"/>
+              <a:gd name="connsiteX36" fmla="*/ 9700933 w 12192418"/>
+              <a:gd name="connsiteY36" fmla="*/ 370626 h 5095933"/>
+              <a:gd name="connsiteX37" fmla="*/ 9977684 w 12192418"/>
+              <a:gd name="connsiteY37" fmla="*/ 341551 h 5095933"/>
+              <a:gd name="connsiteX38" fmla="*/ 10255655 w 12192418"/>
+              <a:gd name="connsiteY38" fmla="*/ 309673 h 5095933"/>
+              <a:gd name="connsiteX39" fmla="*/ 10529968 w 12192418"/>
+              <a:gd name="connsiteY39" fmla="*/ 276043 h 5095933"/>
+              <a:gd name="connsiteX40" fmla="*/ 10807939 w 12192418"/>
+              <a:gd name="connsiteY40" fmla="*/ 236809 h 5095933"/>
+              <a:gd name="connsiteX41" fmla="*/ 11084690 w 12192418"/>
+              <a:gd name="connsiteY41" fmla="*/ 194772 h 5095933"/>
+              <a:gd name="connsiteX42" fmla="*/ 11362661 w 12192418"/>
+              <a:gd name="connsiteY42" fmla="*/ 153085 h 5095933"/>
+              <a:gd name="connsiteX43" fmla="*/ 11639412 w 12192418"/>
+              <a:gd name="connsiteY43" fmla="*/ 104392 h 5095933"/>
+              <a:gd name="connsiteX44" fmla="*/ 11914945 w 12192418"/>
+              <a:gd name="connsiteY44" fmla="*/ 54648 h 5095933"/>
+              <a:gd name="connsiteX45" fmla="*/ 12191696 w 12192418"/>
+              <a:gd name="connsiteY45" fmla="*/ 2452 h 5095933"/>
+              <a:gd name="connsiteX46" fmla="*/ 12191696 w 12192418"/>
+              <a:gd name="connsiteY46" fmla="*/ 2109542 h 5095933"/>
+              <a:gd name="connsiteX47" fmla="*/ 12191999 w 12192418"/>
+              <a:gd name="connsiteY47" fmla="*/ 2109542 h 5095933"/>
+              <a:gd name="connsiteX48" fmla="*/ 12191999 w 12192418"/>
+              <a:gd name="connsiteY48" fmla="*/ 2802467 h 5095933"/>
+              <a:gd name="connsiteX49" fmla="*/ 12192418 w 12192418"/>
+              <a:gd name="connsiteY49" fmla="*/ 2802467 h 5095933"/>
+              <a:gd name="connsiteX50" fmla="*/ 12192418 w 12192418"/>
+              <a:gd name="connsiteY50" fmla="*/ 5095933 h 5095933"/>
+              <a:gd name="connsiteX51" fmla="*/ 1 w 12192418"/>
+              <a:gd name="connsiteY51" fmla="*/ 5095933 h 5095933"/>
+              <a:gd name="connsiteX52" fmla="*/ 1 w 12192418"/>
+              <a:gd name="connsiteY52" fmla="*/ 4074529 h 5095933"/>
+              <a:gd name="connsiteX53" fmla="*/ 0 w 12192418"/>
+              <a:gd name="connsiteY53" fmla="*/ 4074529 h 5095933"/>
+              <a:gd name="connsiteX54" fmla="*/ 0 w 12192418"/>
+              <a:gd name="connsiteY54" fmla="*/ 2109542 h 5095933"/>
+              <a:gd name="connsiteX55" fmla="*/ 1 w 12192418"/>
+              <a:gd name="connsiteY55" fmla="*/ 2109542 h 5095933"/>
+            </a:gdLst>
+            <a:ahLst/>
+            <a:cxnLst>
+              <a:cxn ang="0">
+                <a:pos x="connsiteX0" y="connsiteY0"/>
+              </a:cxn>
+              <a:cxn ang="0">
+                <a:pos x="connsiteX1" y="connsiteY1"/>
+              </a:cxn>
+              <a:cxn ang="0">
+                <a:pos x="connsiteX2" y="connsiteY2"/>
+              </a:cxn>
+              <a:cxn ang="0">
+                <a:pos x="connsiteX3" y="connsiteY3"/>
+              </a:cxn>
+              <a:cxn ang="0">
+                <a:pos x="connsiteX4" y="connsiteY4"/>
+              </a:cxn>
+              <a:cxn ang="0">
+                <a:pos x="connsiteX5" y="connsiteY5"/>
+              </a:cxn>
+              <a:cxn ang="0">
+                <a:pos x="connsiteX6" y="connsiteY6"/>
+              </a:cxn>
+              <a:cxn ang="0">
+                <a:pos x="connsiteX7" y="connsiteY7"/>
+              </a:cxn>
+              <a:cxn ang="0">
+                <a:pos x="connsiteX8" y="connsiteY8"/>
+              </a:cxn>
+              <a:cxn ang="0">
+                <a:pos x="connsiteX9" y="connsiteY9"/>
+              </a:cxn>
+              <a:cxn ang="0">
+                <a:pos x="connsiteX10" y="connsiteY10"/>
+              </a:cxn>
+              <a:cxn ang="0">
+                <a:pos x="connsiteX11" y="connsiteY11"/>
+              </a:cxn>
+              <a:cxn ang="0">
+                <a:pos x="connsiteX12" y="connsiteY12"/>
+              </a:cxn>
+              <a:cxn ang="0">
+                <a:pos x="connsiteX13" y="connsiteY13"/>
+              </a:cxn>
+              <a:cxn ang="0">
+                <a:pos x="connsiteX14" y="connsiteY14"/>
+              </a:cxn>
+              <a:cxn ang="0">
+                <a:pos x="connsiteX15" y="connsiteY15"/>
+              </a:cxn>
+              <a:cxn ang="0">
+                <a:pos x="connsiteX16" y="connsiteY16"/>
+              </a:cxn>
+              <a:cxn ang="0">
+                <a:pos x="connsiteX17" y="connsiteY17"/>
+              </a:cxn>
+              <a:cxn ang="0">
+                <a:pos x="connsiteX18" y="connsiteY18"/>
+              </a:cxn>
+              <a:cxn ang="0">
+                <a:pos x="connsiteX19" y="connsiteY19"/>
+              </a:cxn>
+              <a:cxn ang="0">
+                <a:pos x="connsiteX20" y="connsiteY20"/>
+              </a:cxn>
+              <a:cxn ang="0">
+                <a:pos x="connsiteX21" y="connsiteY21"/>
+              </a:cxn>
+              <a:cxn ang="0">
+                <a:pos x="connsiteX22" y="connsiteY22"/>
+              </a:cxn>
+              <a:cxn ang="0">
+                <a:pos x="connsiteX23" y="connsiteY23"/>
+              </a:cxn>
+              <a:cxn ang="0">
+                <a:pos x="connsiteX24" y="connsiteY24"/>
+              </a:cxn>
+              <a:cxn ang="0">
+                <a:pos x="connsiteX25" y="connsiteY25"/>
+              </a:cxn>
+              <a:cxn ang="0">
+                <a:pos x="connsiteX26" y="connsiteY26"/>
+              </a:cxn>
+              <a:cxn ang="0">
+                <a:pos x="connsiteX27" y="connsiteY27"/>
+              </a:cxn>
+              <a:cxn ang="0">
+                <a:pos x="connsiteX28" y="connsiteY28"/>
+              </a:cxn>
+              <a:cxn ang="0">
+                <a:pos x="connsiteX29" y="connsiteY29"/>
+              </a:cxn>
+              <a:cxn ang="0">
+                <a:pos x="connsiteX30" y="connsiteY30"/>
+              </a:cxn>
+              <a:cxn ang="0">
+                <a:pos x="connsiteX31" y="connsiteY31"/>
+              </a:cxn>
+              <a:cxn ang="0">
+                <a:pos x="connsiteX32" y="connsiteY32"/>
+              </a:cxn>
+              <a:cxn ang="0">
+                <a:pos x="connsiteX33" y="connsiteY33"/>
+              </a:cxn>
+              <a:cxn ang="0">
+                <a:pos x="connsiteX34" y="connsiteY34"/>
+              </a:cxn>
+              <a:cxn ang="0">
+                <a:pos x="connsiteX35" y="connsiteY35"/>
+              </a:cxn>
+              <a:cxn ang="0">
+                <a:pos x="connsiteX36" y="connsiteY36"/>
+              </a:cxn>
+              <a:cxn ang="0">
+                <a:pos x="connsiteX37" y="connsiteY37"/>
+              </a:cxn>
+              <a:cxn ang="0">
+                <a:pos x="connsiteX38" y="connsiteY38"/>
+              </a:cxn>
+              <a:cxn ang="0">
+                <a:pos x="connsiteX39" y="connsiteY39"/>
+              </a:cxn>
+              <a:cxn ang="0">
+                <a:pos x="connsiteX40" y="connsiteY40"/>
+              </a:cxn>
+              <a:cxn ang="0">
+                <a:pos x="connsiteX41" y="connsiteY41"/>
+              </a:cxn>
+              <a:cxn ang="0">
+                <a:pos x="connsiteX42" y="connsiteY42"/>
+              </a:cxn>
+              <a:cxn ang="0">
+                <a:pos x="connsiteX43" y="connsiteY43"/>
+              </a:cxn>
+              <a:cxn ang="0">
+                <a:pos x="connsiteX44" y="connsiteY44"/>
+              </a:cxn>
+              <a:cxn ang="0">
+                <a:pos x="connsiteX45" y="connsiteY45"/>
+              </a:cxn>
+              <a:cxn ang="0">
+                <a:pos x="connsiteX46" y="connsiteY46"/>
+              </a:cxn>
+              <a:cxn ang="0">
+                <a:pos x="connsiteX47" y="connsiteY47"/>
+              </a:cxn>
+              <a:cxn ang="0">
+                <a:pos x="connsiteX48" y="connsiteY48"/>
+              </a:cxn>
+              <a:cxn ang="0">
+                <a:pos x="connsiteX49" y="connsiteY49"/>
+              </a:cxn>
+              <a:cxn ang="0">
+                <a:pos x="connsiteX50" y="connsiteY50"/>
+              </a:cxn>
+              <a:cxn ang="0">
+                <a:pos x="connsiteX51" y="connsiteY51"/>
+              </a:cxn>
+              <a:cxn ang="0">
+                <a:pos x="connsiteX52" y="connsiteY52"/>
+              </a:cxn>
+              <a:cxn ang="0">
+                <a:pos x="connsiteX53" y="connsiteY53"/>
+              </a:cxn>
+              <a:cxn ang="0">
+                <a:pos x="connsiteX54" y="connsiteY54"/>
+              </a:cxn>
+              <a:cxn ang="0">
+                <a:pos x="connsiteX55" y="connsiteY55"/>
+              </a:cxn>
+            </a:cxnLst>
+            <a:rect l="l" t="t" r="r" b="b"/>
+            <a:pathLst>
+              <a:path w="12192418" h="5095933">
+                <a:moveTo>
+                  <a:pt x="1" y="0"/>
+                </a:moveTo>
+                <a:lnTo>
+                  <a:pt x="71932" y="12261"/>
+                </a:lnTo>
+                <a:lnTo>
+                  <a:pt x="282849" y="48343"/>
+                </a:lnTo>
+                <a:lnTo>
+                  <a:pt x="436464" y="73565"/>
+                </a:lnTo>
+                <a:lnTo>
+                  <a:pt x="619339" y="100188"/>
+                </a:lnTo>
+                <a:lnTo>
+                  <a:pt x="836351" y="132066"/>
+                </a:lnTo>
+                <a:lnTo>
+                  <a:pt x="1076528" y="165696"/>
+                </a:lnTo>
+                <a:lnTo>
+                  <a:pt x="1347184" y="201077"/>
+                </a:lnTo>
+                <a:lnTo>
+                  <a:pt x="1642223" y="238560"/>
+                </a:lnTo>
+                <a:lnTo>
+                  <a:pt x="1962864" y="276043"/>
+                </a:lnTo>
+                <a:lnTo>
+                  <a:pt x="2304232" y="314227"/>
+                </a:lnTo>
+                <a:lnTo>
+                  <a:pt x="2672421" y="349608"/>
+                </a:lnTo>
+                <a:lnTo>
+                  <a:pt x="3057678" y="383588"/>
+                </a:lnTo>
+                <a:lnTo>
+                  <a:pt x="3464881" y="414415"/>
+                </a:lnTo>
+                <a:lnTo>
+                  <a:pt x="3889152" y="443841"/>
+                </a:lnTo>
+                <a:lnTo>
+                  <a:pt x="4331710" y="471515"/>
+                </a:lnTo>
+                <a:lnTo>
+                  <a:pt x="4558476" y="481324"/>
+                </a:lnTo>
+                <a:lnTo>
+                  <a:pt x="4790118" y="492183"/>
+                </a:lnTo>
+                <a:lnTo>
+                  <a:pt x="5025418" y="502342"/>
+                </a:lnTo>
+                <a:lnTo>
+                  <a:pt x="5261937" y="508998"/>
+                </a:lnTo>
+                <a:lnTo>
+                  <a:pt x="5503332" y="514953"/>
+                </a:lnTo>
+                <a:lnTo>
+                  <a:pt x="5747167" y="521259"/>
+                </a:lnTo>
+                <a:lnTo>
+                  <a:pt x="5995877" y="525463"/>
+                </a:lnTo>
+                <a:lnTo>
+                  <a:pt x="6247026" y="525463"/>
+                </a:lnTo>
+                <a:lnTo>
+                  <a:pt x="6500613" y="527565"/>
+                </a:lnTo>
+                <a:lnTo>
+                  <a:pt x="6756639" y="525463"/>
+                </a:lnTo>
+                <a:lnTo>
+                  <a:pt x="7016322" y="521259"/>
+                </a:lnTo>
+                <a:lnTo>
+                  <a:pt x="7276005" y="517406"/>
+                </a:lnTo>
+                <a:lnTo>
+                  <a:pt x="7539345" y="508998"/>
+                </a:lnTo>
+                <a:lnTo>
+                  <a:pt x="7805124" y="500241"/>
+                </a:lnTo>
+                <a:lnTo>
+                  <a:pt x="8070903" y="490082"/>
+                </a:lnTo>
+                <a:lnTo>
+                  <a:pt x="8339121" y="475719"/>
+                </a:lnTo>
+                <a:lnTo>
+                  <a:pt x="8609776" y="458554"/>
+                </a:lnTo>
+                <a:lnTo>
+                  <a:pt x="8881651" y="442089"/>
+                </a:lnTo>
+                <a:lnTo>
+                  <a:pt x="9153526" y="421071"/>
+                </a:lnTo>
+                <a:lnTo>
+                  <a:pt x="9429058" y="395849"/>
+                </a:lnTo>
+                <a:lnTo>
+                  <a:pt x="9700933" y="370626"/>
+                </a:lnTo>
+                <a:lnTo>
+                  <a:pt x="9977684" y="341551"/>
+                </a:lnTo>
+                <a:lnTo>
+                  <a:pt x="10255655" y="309673"/>
+                </a:lnTo>
+                <a:lnTo>
+                  <a:pt x="10529968" y="276043"/>
+                </a:lnTo>
+                <a:lnTo>
+                  <a:pt x="10807939" y="236809"/>
+                </a:lnTo>
+                <a:lnTo>
+                  <a:pt x="11084690" y="194772"/>
+                </a:lnTo>
+                <a:lnTo>
+                  <a:pt x="11362661" y="153085"/>
+                </a:lnTo>
+                <a:lnTo>
+                  <a:pt x="11639412" y="104392"/>
+                </a:lnTo>
+                <a:lnTo>
+                  <a:pt x="11914945" y="54648"/>
+                </a:lnTo>
+                <a:lnTo>
+                  <a:pt x="12191696" y="2452"/>
+                </a:lnTo>
+                <a:lnTo>
+                  <a:pt x="12191696" y="2109542"/>
+                </a:lnTo>
+                <a:lnTo>
+                  <a:pt x="12191999" y="2109542"/>
+                </a:lnTo>
+                <a:lnTo>
+                  <a:pt x="12191999" y="2802467"/>
+                </a:lnTo>
+                <a:lnTo>
+                  <a:pt x="12192418" y="2802467"/>
+                </a:lnTo>
+                <a:lnTo>
+                  <a:pt x="12192418" y="5095933"/>
+                </a:lnTo>
+                <a:lnTo>
+                  <a:pt x="1" y="5095933"/>
+                </a:lnTo>
+                <a:lnTo>
+                  <a:pt x="1" y="4074529"/>
+                </a:lnTo>
+                <a:lnTo>
+                  <a:pt x="0" y="4074529"/>
+                </a:lnTo>
+                <a:lnTo>
+                  <a:pt x="0" y="2109542"/>
+                </a:lnTo>
+                <a:lnTo>
+                  <a:pt x="1" y="2109542"/>
+                </a:lnTo>
+                <a:close/>
+              </a:path>
+            </a:pathLst>
+          </a:custGeom>
+          <a:solidFill>
+            <a:schemeClr val="bg1"/>
+          </a:solidFill>
+          <a:ln>
+            <a:noFill/>
+          </a:ln>
+        </p:spPr>
+        <p:txBody>
+          <a:bodyPr/>
+          <a:lstStyle/>
+          <a:p>
+            <a:endParaRPr lang="en-GB"/>
+          </a:p>
+        </p:txBody>
+      </p:sp>
+      <p:graphicFrame>
+        <p:nvGraphicFramePr>
+          <p:cNvPr id="5" name="Content Placeholder 2">
+            <a:extLst>
+              <a:ext uri="{FF2B5EF4-FFF2-40B4-BE49-F238E27FC236}">
+                <a16:creationId xmlns:a16="http://schemas.microsoft.com/office/drawing/2014/main" id="{49ECBC6F-EFD3-8280-7E08-CB4FAAB50F7A}"/>
+              </a:ext>
+            </a:extLst>
+          </p:cNvPr>
+          <p:cNvGraphicFramePr>
+            <a:graphicFrameLocks noGrp="1"/>
+          </p:cNvGraphicFramePr>
+          <p:nvPr>
+            <p:ph idx="1"/>
+            <p:extLst>
+              <p:ext uri="{D42A27DB-BD31-4B8C-83A1-F6EECF244321}">
+                <p14:modId xmlns:p14="http://schemas.microsoft.com/office/powerpoint/2010/main" val="4236913249"/>
+              </p:ext>
+            </p:extLst>
+          </p:nvPr>
+        </p:nvGraphicFramePr>
+        <p:xfrm>
+          <a:off x="486234" y="2363006"/>
+          <a:ext cx="8171528" cy="3404277"/>
+        </p:xfrm>
+        <a:graphic>
+          <a:graphicData uri="http://schemas.openxmlformats.org/drawingml/2006/diagram">
+            <dgm:relIds xmlns:dgm="http://schemas.openxmlformats.org/drawingml/2006/diagram" xmlns:r="http://schemas.openxmlformats.org/officeDocument/2006/relationships" r:dm="rId2" r:lo="rId3" r:qs="rId4" r:cs="rId5"/>
+          </a:graphicData>
+        </a:graphic>
+      </p:graphicFrame>
+      <p:pic>
+        <p:nvPicPr>
+          <p:cNvPr id="4" name="Immagine 3" descr="Immagine che contiene cerchio, Elementi grafici, design, schermata&#10;&#10;Il contenuto generato dall'IA potrebbe non essere corretto.">
+            <a:extLst>
+              <a:ext uri="{FF2B5EF4-FFF2-40B4-BE49-F238E27FC236}">
+                <a16:creationId xmlns:a16="http://schemas.microsoft.com/office/drawing/2014/main" id="{0F06316D-B9AA-D448-5CA5-ED877B7B6436}"/>
+              </a:ext>
+            </a:extLst>
+          </p:cNvPr>
+          <p:cNvPicPr>
+            <a:picLocks noChangeAspect="1"/>
+          </p:cNvPicPr>
+          <p:nvPr/>
+        </p:nvPicPr>
+        <p:blipFill>
+          <a:blip r:embed="rId7"/>
+          <a:stretch>
+            <a:fillRect/>
+          </a:stretch>
+        </p:blipFill>
+        <p:spPr>
+          <a:xfrm>
+            <a:off x="6964022" y="-76844"/>
+            <a:ext cx="2381250" cy="2428875"/>
+          </a:xfrm>
+          <a:prstGeom prst="rect">
+            <a:avLst/>
+          </a:prstGeom>
+        </p:spPr>
+      </p:pic>
+      <p:pic>
+        <p:nvPicPr>
+          <p:cNvPr id="7" name="Immagine 6">
+            <a:extLst>
+              <a:ext uri="{FF2B5EF4-FFF2-40B4-BE49-F238E27FC236}">
+                <a16:creationId xmlns:a16="http://schemas.microsoft.com/office/drawing/2014/main" id="{C38F68E3-5606-1756-F608-8D457B404E54}"/>
+              </a:ext>
+            </a:extLst>
+          </p:cNvPr>
+          <p:cNvPicPr>
+            <a:picLocks noChangeAspect="1"/>
+          </p:cNvPicPr>
+          <p:nvPr/>
+        </p:nvPicPr>
+        <p:blipFill>
+          <a:blip r:embed="rId8"/>
+          <a:stretch>
+            <a:fillRect/>
+          </a:stretch>
+        </p:blipFill>
+        <p:spPr>
+          <a:xfrm>
+            <a:off x="738186" y="6228733"/>
+            <a:ext cx="7667625" cy="466725"/>
+          </a:xfrm>
+          <a:prstGeom prst="rect">
+            <a:avLst/>
+          </a:prstGeom>
+        </p:spPr>
+      </p:pic>
+      <p:pic>
+        <p:nvPicPr>
+          <p:cNvPr id="6" name="Immagine 5">
+            <a:extLst>
+              <a:ext uri="{FF2B5EF4-FFF2-40B4-BE49-F238E27FC236}">
+                <a16:creationId xmlns:a16="http://schemas.microsoft.com/office/drawing/2014/main" id="{8215A0CD-5692-86EF-48A9-EB964EC2B2A5}"/>
+              </a:ext>
+            </a:extLst>
+          </p:cNvPr>
+          <p:cNvPicPr>
+            <a:picLocks noChangeAspect="1"/>
+          </p:cNvPicPr>
+          <p:nvPr/>
+        </p:nvPicPr>
+        <p:blipFill>
+          <a:blip r:embed="rId9"/>
+          <a:stretch>
+            <a:fillRect/>
+          </a:stretch>
+        </p:blipFill>
+        <p:spPr>
+          <a:xfrm>
+            <a:off x="-313" y="0"/>
+            <a:ext cx="7316221" cy="685896"/>
+          </a:xfrm>
+          <a:prstGeom prst="rect">
+            <a:avLst/>
+          </a:prstGeom>
+        </p:spPr>
+      </p:pic>
+    </p:spTree>
+  </p:cSld>
+  <p:clrMapOvr>
+    <a:overrideClrMapping bg1="lt1" tx1="dk1" bg2="lt2" tx2="dk2" accent1="accent1" accent2="accent2" accent3="accent3" accent4="accent4" accent5="accent5" accent6="accent6" hlink="hlink" folHlink="folHlink"/>
+  </p:clrMapOvr>
+</p:sld>
+</file>
+
+<file path=ppt/slides/slide13.xml><?xml version="1.0" encoding="utf-8"?>
+<p:sld xmlns:a="http://schemas.openxmlformats.org/drawingml/2006/main" xmlns:r="http://schemas.openxmlformats.org/officeDocument/2006/relationships" xmlns:p="http://schemas.openxmlformats.org/presentationml/2006/main">
+  <p:cSld>
+    <p:bg>
+      <p:bgPr>
+        <a:solidFill>
+          <a:schemeClr val="bg1"/>
+        </a:solidFill>
+        <a:effectLst/>
+      </p:bgPr>
+    </p:bg>
+    <p:spTree>
+      <p:nvGrpSpPr>
+        <p:cNvPr id="1" name=""/>
+        <p:cNvGrpSpPr/>
+        <p:nvPr/>
+      </p:nvGrpSpPr>
+      <p:grpSpPr>
+        <a:xfrm>
+          <a:off x="0" y="0"/>
+          <a:ext cx="0" cy="0"/>
+          <a:chOff x="0" y="0"/>
+          <a:chExt cx="0" cy="0"/>
+        </a:xfrm>
+      </p:grpSpPr>
+      <p:sp>
+        <p:nvSpPr>
+          <p:cNvPr id="9" name="Rectangle 8">
+            <a:extLst>
+              <a:ext uri="{FF2B5EF4-FFF2-40B4-BE49-F238E27FC236}">
+                <a16:creationId xmlns:a16="http://schemas.microsoft.com/office/drawing/2014/main" id="{F747F1B4-B831-4277-8AB0-32767F7EB7BF}"/>
+              </a:ext>
+              <a:ext uri="{C183D7F6-B498-43B3-948B-1728B52AA6E4}">
+                <adec:decorative xmlns:adec="http://schemas.microsoft.com/office/drawing/2017/decorative" val="1"/>
+              </a:ext>
+            </a:extLst>
+          </p:cNvPr>
+          <p:cNvSpPr>
+            <a:spLocks noGrp="1" noRot="1" noChangeAspect="1" noMove="1" noResize="1" noEditPoints="1" noAdjustHandles="1" noChangeArrowheads="1" noChangeShapeType="1" noTextEdit="1"/>
+          </p:cNvSpPr>
+          <p:nvPr>
+            <p:extLst>
+              <p:ext uri="{386F3935-93C4-4BCD-93E2-E3B085C9AB24}">
+                <p16:designElem xmlns:p16="http://schemas.microsoft.com/office/powerpoint/2015/main" val="1"/>
+              </p:ext>
+            </p:extLst>
+          </p:nvPr>
+        </p:nvSpPr>
+        <p:spPr>
+          <a:xfrm>
+            <a:off x="0" y="0"/>
+            <a:ext cx="9143999" cy="6858000"/>
+          </a:xfrm>
+          <a:prstGeom prst="rect">
+            <a:avLst/>
+          </a:prstGeom>
+          <a:ln>
+            <a:noFill/>
+          </a:ln>
+        </p:spPr>
+        <p:style>
+          <a:lnRef idx="2">
+            <a:schemeClr val="accent1">
+              <a:shade val="50000"/>
+            </a:schemeClr>
+          </a:lnRef>
+          <a:fillRef idx="1003">
+            <a:schemeClr val="dk2"/>
+          </a:fillRef>
+          <a:effectRef idx="0">
+            <a:schemeClr val="accent1"/>
+          </a:effectRef>
+          <a:fontRef idx="minor">
+            <a:schemeClr val="lt1"/>
+          </a:fontRef>
+        </p:style>
+        <p:txBody>
+          <a:bodyPr rtlCol="0" anchor="ctr"/>
+          <a:lstStyle/>
+          <a:p>
+            <a:pPr algn="ctr"/>
+            <a:endParaRPr lang="en-US"/>
+          </a:p>
+        </p:txBody>
+      </p:sp>
+      <p:sp>
+        <p:nvSpPr>
+          <p:cNvPr id="11" name="Freeform 7">
+            <a:extLst>
+              <a:ext uri="{FF2B5EF4-FFF2-40B4-BE49-F238E27FC236}">
+                <a16:creationId xmlns:a16="http://schemas.microsoft.com/office/drawing/2014/main" id="{D80CFA21-AB7C-4BEB-9BFF-05764FBBF3C6}"/>
+              </a:ext>
+              <a:ext uri="{C183D7F6-B498-43B3-948B-1728B52AA6E4}">
+                <adec:decorative xmlns:adec="http://schemas.microsoft.com/office/drawing/2017/decorative" val="1"/>
+              </a:ext>
+            </a:extLst>
+          </p:cNvPr>
+          <p:cNvSpPr>
+            <a:spLocks noGrp="1" noRot="1" noChangeAspect="1" noMove="1" noResize="1" noEditPoints="1" noAdjustHandles="1" noChangeArrowheads="1" noChangeShapeType="1" noTextEdit="1"/>
+          </p:cNvSpPr>
+          <p:nvPr>
+            <p:extLst>
+              <p:ext uri="{386F3935-93C4-4BCD-93E2-E3B085C9AB24}">
+                <p16:designElem xmlns:p16="http://schemas.microsoft.com/office/powerpoint/2015/main" val="1"/>
+              </p:ext>
+            </p:extLst>
+          </p:nvPr>
+        </p:nvSpPr>
+        <p:spPr>
+          <a:xfrm>
+            <a:off x="6539954" y="1460230"/>
+            <a:ext cx="2604045" cy="825932"/>
+          </a:xfrm>
+          <a:custGeom>
+            <a:avLst/>
+            <a:gdLst>
+              <a:gd name="connsiteX0" fmla="*/ 3470310 w 3472060"/>
+              <a:gd name="connsiteY0" fmla="*/ 0 h 825932"/>
+              <a:gd name="connsiteX1" fmla="*/ 3472060 w 3472060"/>
+              <a:gd name="connsiteY1" fmla="*/ 12850 h 825932"/>
+              <a:gd name="connsiteX2" fmla="*/ 3472060 w 3472060"/>
+              <a:gd name="connsiteY2" fmla="*/ 480529 h 825932"/>
+              <a:gd name="connsiteX3" fmla="*/ 3363699 w 3472060"/>
+              <a:gd name="connsiteY3" fmla="*/ 498471 h 825932"/>
+              <a:gd name="connsiteX4" fmla="*/ 42060 w 3472060"/>
+              <a:gd name="connsiteY4" fmla="*/ 824486 h 825932"/>
+              <a:gd name="connsiteX5" fmla="*/ 0 w 3472060"/>
+              <a:gd name="connsiteY5" fmla="*/ 758452 h 825932"/>
+              <a:gd name="connsiteX6" fmla="*/ 188014 w 3472060"/>
+              <a:gd name="connsiteY6" fmla="*/ 735602 h 825932"/>
+              <a:gd name="connsiteX7" fmla="*/ 284087 w 3472060"/>
+              <a:gd name="connsiteY7" fmla="*/ 722590 h 825932"/>
+              <a:gd name="connsiteX8" fmla="*/ 382288 w 3472060"/>
+              <a:gd name="connsiteY8" fmla="*/ 709392 h 825932"/>
+              <a:gd name="connsiteX9" fmla="*/ 481858 w 3472060"/>
+              <a:gd name="connsiteY9" fmla="*/ 695774 h 825932"/>
+              <a:gd name="connsiteX10" fmla="*/ 581897 w 3472060"/>
+              <a:gd name="connsiteY10" fmla="*/ 680711 h 825932"/>
+              <a:gd name="connsiteX11" fmla="*/ 683670 w 3472060"/>
+              <a:gd name="connsiteY11" fmla="*/ 665256 h 825932"/>
+              <a:gd name="connsiteX12" fmla="*/ 787206 w 3472060"/>
+              <a:gd name="connsiteY12" fmla="*/ 649587 h 825932"/>
+              <a:gd name="connsiteX13" fmla="*/ 892019 w 3472060"/>
+              <a:gd name="connsiteY13" fmla="*/ 632968 h 825932"/>
+              <a:gd name="connsiteX14" fmla="*/ 997620 w 3472060"/>
+              <a:gd name="connsiteY14" fmla="*/ 614667 h 825932"/>
+              <a:gd name="connsiteX15" fmla="*/ 1104727 w 3472060"/>
+              <a:gd name="connsiteY15" fmla="*/ 596741 h 825932"/>
+              <a:gd name="connsiteX16" fmla="*/ 1212669 w 3472060"/>
+              <a:gd name="connsiteY16" fmla="*/ 577397 h 825932"/>
+              <a:gd name="connsiteX17" fmla="*/ 1321506 w 3472060"/>
+              <a:gd name="connsiteY17" fmla="*/ 556988 h 825932"/>
+              <a:gd name="connsiteX18" fmla="*/ 1430709 w 3472060"/>
+              <a:gd name="connsiteY18" fmla="*/ 536607 h 825932"/>
+              <a:gd name="connsiteX19" fmla="*/ 1541050 w 3472060"/>
+              <a:gd name="connsiteY19" fmla="*/ 514481 h 825932"/>
+              <a:gd name="connsiteX20" fmla="*/ 1652805 w 3472060"/>
+              <a:gd name="connsiteY20" fmla="*/ 492202 h 825932"/>
+              <a:gd name="connsiteX21" fmla="*/ 1763708 w 3472060"/>
+              <a:gd name="connsiteY21" fmla="*/ 469161 h 825932"/>
+              <a:gd name="connsiteX22" fmla="*/ 1875795 w 3472060"/>
+              <a:gd name="connsiteY22" fmla="*/ 444641 h 825932"/>
+              <a:gd name="connsiteX23" fmla="*/ 1989128 w 3472060"/>
+              <a:gd name="connsiteY23" fmla="*/ 418995 h 825932"/>
+              <a:gd name="connsiteX24" fmla="*/ 2102476 w 3472060"/>
+              <a:gd name="connsiteY24" fmla="*/ 393438 h 825932"/>
+              <a:gd name="connsiteX25" fmla="*/ 2215549 w 3472060"/>
+              <a:gd name="connsiteY25" fmla="*/ 366291 h 825932"/>
+              <a:gd name="connsiteX26" fmla="*/ 2330490 w 3472060"/>
+              <a:gd name="connsiteY26" fmla="*/ 337455 h 825932"/>
+              <a:gd name="connsiteX27" fmla="*/ 2443333 w 3472060"/>
+              <a:gd name="connsiteY27" fmla="*/ 308983 h 825932"/>
+              <a:gd name="connsiteX28" fmla="*/ 2558014 w 3472060"/>
+              <a:gd name="connsiteY28" fmla="*/ 278646 h 825932"/>
+              <a:gd name="connsiteX29" fmla="*/ 2673621 w 3472060"/>
+              <a:gd name="connsiteY29" fmla="*/ 247421 h 825932"/>
+              <a:gd name="connsiteX30" fmla="*/ 2787008 w 3472060"/>
+              <a:gd name="connsiteY30" fmla="*/ 215853 h 825932"/>
+              <a:gd name="connsiteX31" fmla="*/ 2901442 w 3472060"/>
+              <a:gd name="connsiteY31" fmla="*/ 182011 h 825932"/>
+              <a:gd name="connsiteX32" fmla="*/ 3015722 w 3472060"/>
+              <a:gd name="connsiteY32" fmla="*/ 147286 h 825932"/>
+              <a:gd name="connsiteX33" fmla="*/ 3130018 w 3472060"/>
+              <a:gd name="connsiteY33" fmla="*/ 112649 h 825932"/>
+              <a:gd name="connsiteX34" fmla="*/ 3243551 w 3472060"/>
+              <a:gd name="connsiteY34" fmla="*/ 75688 h 825932"/>
+              <a:gd name="connsiteX35" fmla="*/ 3356992 w 3472060"/>
+              <a:gd name="connsiteY35" fmla="*/ 38197 h 825932"/>
+              <a:gd name="connsiteX36" fmla="*/ 3470310 w 3472060"/>
+              <a:gd name="connsiteY36" fmla="*/ 0 h 825932"/>
+            </a:gdLst>
+            <a:ahLst/>
+            <a:cxnLst>
+              <a:cxn ang="0">
+                <a:pos x="connsiteX0" y="connsiteY0"/>
+              </a:cxn>
+              <a:cxn ang="0">
+                <a:pos x="connsiteX1" y="connsiteY1"/>
+              </a:cxn>
+              <a:cxn ang="0">
+                <a:pos x="connsiteX2" y="connsiteY2"/>
+              </a:cxn>
+              <a:cxn ang="0">
+                <a:pos x="connsiteX3" y="connsiteY3"/>
+              </a:cxn>
+              <a:cxn ang="0">
+                <a:pos x="connsiteX4" y="connsiteY4"/>
+              </a:cxn>
+              <a:cxn ang="0">
+                <a:pos x="connsiteX5" y="connsiteY5"/>
+              </a:cxn>
+              <a:cxn ang="0">
+                <a:pos x="connsiteX6" y="connsiteY6"/>
+              </a:cxn>
+              <a:cxn ang="0">
+                <a:pos x="connsiteX7" y="connsiteY7"/>
+              </a:cxn>
+              <a:cxn ang="0">
+                <a:pos x="connsiteX8" y="connsiteY8"/>
+              </a:cxn>
+              <a:cxn ang="0">
+                <a:pos x="connsiteX9" y="connsiteY9"/>
+              </a:cxn>
+              <a:cxn ang="0">
+                <a:pos x="connsiteX10" y="connsiteY10"/>
+              </a:cxn>
+              <a:cxn ang="0">
+                <a:pos x="connsiteX11" y="connsiteY11"/>
+              </a:cxn>
+              <a:cxn ang="0">
+                <a:pos x="connsiteX12" y="connsiteY12"/>
+              </a:cxn>
+              <a:cxn ang="0">
+                <a:pos x="connsiteX13" y="connsiteY13"/>
+              </a:cxn>
+              <a:cxn ang="0">
+                <a:pos x="connsiteX14" y="connsiteY14"/>
+              </a:cxn>
+              <a:cxn ang="0">
+                <a:pos x="connsiteX15" y="connsiteY15"/>
+              </a:cxn>
+              <a:cxn ang="0">
+                <a:pos x="connsiteX16" y="connsiteY16"/>
+              </a:cxn>
+              <a:cxn ang="0">
+                <a:pos x="connsiteX17" y="connsiteY17"/>
+              </a:cxn>
+              <a:cxn ang="0">
+                <a:pos x="connsiteX18" y="connsiteY18"/>
+              </a:cxn>
+              <a:cxn ang="0">
+                <a:pos x="connsiteX19" y="connsiteY19"/>
+              </a:cxn>
+              <a:cxn ang="0">
+                <a:pos x="connsiteX20" y="connsiteY20"/>
+              </a:cxn>
+              <a:cxn ang="0">
+                <a:pos x="connsiteX21" y="connsiteY21"/>
+              </a:cxn>
+              <a:cxn ang="0">
+                <a:pos x="connsiteX22" y="connsiteY22"/>
+              </a:cxn>
+              <a:cxn ang="0">
+                <a:pos x="connsiteX23" y="connsiteY23"/>
+              </a:cxn>
+              <a:cxn ang="0">
+                <a:pos x="connsiteX24" y="connsiteY24"/>
+              </a:cxn>
+              <a:cxn ang="0">
+                <a:pos x="connsiteX25" y="connsiteY25"/>
+              </a:cxn>
+              <a:cxn ang="0">
+                <a:pos x="connsiteX26" y="connsiteY26"/>
+              </a:cxn>
+              <a:cxn ang="0">
+                <a:pos x="connsiteX27" y="connsiteY27"/>
+              </a:cxn>
+              <a:cxn ang="0">
+                <a:pos x="connsiteX28" y="connsiteY28"/>
+              </a:cxn>
+              <a:cxn ang="0">
+                <a:pos x="connsiteX29" y="connsiteY29"/>
+              </a:cxn>
+              <a:cxn ang="0">
+                <a:pos x="connsiteX30" y="connsiteY30"/>
+              </a:cxn>
+              <a:cxn ang="0">
+                <a:pos x="connsiteX31" y="connsiteY31"/>
+              </a:cxn>
+              <a:cxn ang="0">
+                <a:pos x="connsiteX32" y="connsiteY32"/>
+              </a:cxn>
+              <a:cxn ang="0">
+                <a:pos x="connsiteX33" y="connsiteY33"/>
+              </a:cxn>
+              <a:cxn ang="0">
+                <a:pos x="connsiteX34" y="connsiteY34"/>
+              </a:cxn>
+              <a:cxn ang="0">
+                <a:pos x="connsiteX35" y="connsiteY35"/>
+              </a:cxn>
+              <a:cxn ang="0">
+                <a:pos x="connsiteX36" y="connsiteY36"/>
+              </a:cxn>
+            </a:cxnLst>
+            <a:rect l="l" t="t" r="r" b="b"/>
+            <a:pathLst>
+              <a:path w="3472060" h="825932">
+                <a:moveTo>
+                  <a:pt x="3470310" y="0"/>
+                </a:moveTo>
+                <a:lnTo>
+                  <a:pt x="3472060" y="12850"/>
+                </a:lnTo>
+                <a:lnTo>
+                  <a:pt x="3472060" y="480529"/>
+                </a:lnTo>
+                <a:lnTo>
+                  <a:pt x="3363699" y="498471"/>
+                </a:lnTo>
+                <a:cubicBezTo>
+                  <a:pt x="2435623" y="645518"/>
+                  <a:pt x="603076" y="844866"/>
+                  <a:pt x="42060" y="824486"/>
+                </a:cubicBezTo>
+                <a:cubicBezTo>
+                  <a:pt x="28151" y="802425"/>
+                  <a:pt x="13909" y="780513"/>
+                  <a:pt x="0" y="758452"/>
+                </a:cubicBezTo>
+                <a:lnTo>
+                  <a:pt x="188014" y="735602"/>
+                </a:lnTo>
+                <a:lnTo>
+                  <a:pt x="284087" y="722590"/>
+                </a:lnTo>
+                <a:lnTo>
+                  <a:pt x="382288" y="709392"/>
+                </a:lnTo>
+                <a:lnTo>
+                  <a:pt x="481858" y="695774"/>
+                </a:lnTo>
+                <a:lnTo>
+                  <a:pt x="581897" y="680711"/>
+                </a:lnTo>
+                <a:lnTo>
+                  <a:pt x="683670" y="665256"/>
+                </a:lnTo>
+                <a:lnTo>
+                  <a:pt x="787206" y="649587"/>
+                </a:lnTo>
+                <a:lnTo>
+                  <a:pt x="892019" y="632968"/>
+                </a:lnTo>
+                <a:lnTo>
+                  <a:pt x="997620" y="614667"/>
+                </a:lnTo>
+                <a:lnTo>
+                  <a:pt x="1104727" y="596741"/>
+                </a:lnTo>
+                <a:lnTo>
+                  <a:pt x="1212669" y="577397"/>
+                </a:lnTo>
+                <a:lnTo>
+                  <a:pt x="1321506" y="556988"/>
+                </a:lnTo>
+                <a:lnTo>
+                  <a:pt x="1430709" y="536607"/>
+                </a:lnTo>
+                <a:lnTo>
+                  <a:pt x="1541050" y="514481"/>
+                </a:lnTo>
+                <a:lnTo>
+                  <a:pt x="1652805" y="492202"/>
+                </a:lnTo>
+                <a:lnTo>
+                  <a:pt x="1763708" y="469161"/>
+                </a:lnTo>
+                <a:lnTo>
+                  <a:pt x="1875795" y="444641"/>
+                </a:lnTo>
+                <a:lnTo>
+                  <a:pt x="1989128" y="418995"/>
+                </a:lnTo>
+                <a:lnTo>
+                  <a:pt x="2102476" y="393438"/>
+                </a:lnTo>
+                <a:lnTo>
+                  <a:pt x="2215549" y="366291"/>
+                </a:lnTo>
+                <a:lnTo>
+                  <a:pt x="2330490" y="337455"/>
+                </a:lnTo>
+                <a:lnTo>
+                  <a:pt x="2443333" y="308983"/>
+                </a:lnTo>
+                <a:lnTo>
+                  <a:pt x="2558014" y="278646"/>
+                </a:lnTo>
+                <a:lnTo>
+                  <a:pt x="2673621" y="247421"/>
+                </a:lnTo>
+                <a:lnTo>
+                  <a:pt x="2787008" y="215853"/>
+                </a:lnTo>
+                <a:lnTo>
+                  <a:pt x="2901442" y="182011"/>
+                </a:lnTo>
+                <a:lnTo>
+                  <a:pt x="3015722" y="147286"/>
+                </a:lnTo>
+                <a:lnTo>
+                  <a:pt x="3130018" y="112649"/>
+                </a:lnTo>
+                <a:lnTo>
+                  <a:pt x="3243551" y="75688"/>
+                </a:lnTo>
+                <a:lnTo>
+                  <a:pt x="3356992" y="38197"/>
+                </a:lnTo>
+                <a:lnTo>
+                  <a:pt x="3470310" y="0"/>
+                </a:lnTo>
+                <a:close/>
+              </a:path>
+            </a:pathLst>
+          </a:custGeom>
+          <a:solidFill>
+            <a:schemeClr val="bg1">
+              <a:alpha val="20000"/>
+            </a:schemeClr>
+          </a:solidFill>
+          <a:ln>
+            <a:noFill/>
+          </a:ln>
+        </p:spPr>
+        <p:txBody>
+          <a:bodyPr rtlCol="0" anchor="ctr"/>
+          <a:lstStyle/>
+          <a:p>
+            <a:pPr algn="ctr"/>
+            <a:endParaRPr lang="en-US">
+              <a:solidFill>
+                <a:schemeClr val="tx1"/>
+              </a:solidFill>
+            </a:endParaRPr>
+          </a:p>
+        </p:txBody>
+      </p:sp>
+      <p:sp>
+        <p:nvSpPr>
+          <p:cNvPr id="2" name="Title 1"/>
+          <p:cNvSpPr>
+            <a:spLocks noGrp="1"/>
+          </p:cNvSpPr>
+          <p:nvPr>
+            <p:ph type="title"/>
+          </p:nvPr>
+        </p:nvSpPr>
+        <p:spPr>
+          <a:xfrm>
+            <a:off x="457075" y="1023228"/>
+            <a:ext cx="6939116" cy="1016654"/>
+          </a:xfrm>
+        </p:spPr>
+        <p:txBody>
+          <a:bodyPr>
+            <a:normAutofit/>
+          </a:bodyPr>
+          <a:lstStyle/>
+          <a:p>
+            <a:pPr>
+              <a:lnSpc>
+                <a:spcPct val="90000"/>
+              </a:lnSpc>
+            </a:pPr>
+            <a:r>
+              <a:rPr lang="en-GB" sz="3600" dirty="0" err="1">
+                <a:solidFill>
+                  <a:srgbClr val="EBEBEB"/>
+                </a:solidFill>
+              </a:rPr>
+              <a:t>Vantaggi</a:t>
+            </a:r>
+            <a:r>
+              <a:rPr lang="en-GB" sz="3600" dirty="0">
+                <a:solidFill>
+                  <a:srgbClr val="EBEBEB"/>
+                </a:solidFill>
+              </a:rPr>
+              <a:t> </a:t>
+            </a:r>
+            <a:r>
+              <a:rPr lang="en-GB" sz="3600" dirty="0" err="1">
+                <a:solidFill>
+                  <a:srgbClr val="EBEBEB"/>
+                </a:solidFill>
+              </a:rPr>
+              <a:t>dell'uso</a:t>
+            </a:r>
+            <a:r>
+              <a:rPr lang="en-GB" sz="3600" dirty="0">
+                <a:solidFill>
+                  <a:srgbClr val="EBEBEB"/>
+                </a:solidFill>
+              </a:rPr>
+              <a:t> </a:t>
+            </a:r>
+            <a:r>
+              <a:rPr lang="en-GB" sz="3600" dirty="0" err="1">
+                <a:solidFill>
+                  <a:srgbClr val="EBEBEB"/>
+                </a:solidFill>
+              </a:rPr>
+              <a:t>delle</a:t>
+            </a:r>
+            <a:r>
+              <a:rPr lang="en-GB" sz="3600" dirty="0">
+                <a:solidFill>
+                  <a:srgbClr val="EBEBEB"/>
+                </a:solidFill>
+              </a:rPr>
+              <a:t> Classi</a:t>
             </a:r>
           </a:p>
         </p:txBody>
@@ -33916,7 +35180,7 @@
           <p:cNvPr id="5" name="Content Placeholder 2">
             <a:extLst>
               <a:ext uri="{FF2B5EF4-FFF2-40B4-BE49-F238E27FC236}">
-                <a16:creationId xmlns:a16="http://schemas.microsoft.com/office/drawing/2014/main" id="{49ECBC6F-EFD3-8280-7E08-CB4FAAB50F7A}"/>
+                <a16:creationId xmlns:a16="http://schemas.microsoft.com/office/drawing/2014/main" id="{8B13C577-DCCD-0D32-2D05-46A3C3726471}"/>
               </a:ext>
             </a:extLst>
           </p:cNvPr>
@@ -33927,13 +35191,13 @@
             <p:ph idx="1"/>
             <p:extLst>
               <p:ext uri="{D42A27DB-BD31-4B8C-83A1-F6EECF244321}">
-                <p14:modId xmlns:p14="http://schemas.microsoft.com/office/powerpoint/2010/main" val="1865696517"/>
+                <p14:modId xmlns:p14="http://schemas.microsoft.com/office/powerpoint/2010/main" val="684062246"/>
               </p:ext>
             </p:extLst>
           </p:nvPr>
         </p:nvGraphicFramePr>
         <p:xfrm>
-          <a:off x="486697" y="2810256"/>
+          <a:off x="486234" y="2442687"/>
           <a:ext cx="8171528" cy="3404277"/>
         </p:xfrm>
         <a:graphic>
@@ -33947,7 +35211,7 @@
           <p:cNvPr id="4" name="Immagine 3" descr="Immagine che contiene cerchio, Elementi grafici, design, schermata&#10;&#10;Il contenuto generato dall'IA potrebbe non essere corretto.">
             <a:extLst>
               <a:ext uri="{FF2B5EF4-FFF2-40B4-BE49-F238E27FC236}">
-                <a16:creationId xmlns:a16="http://schemas.microsoft.com/office/drawing/2014/main" id="{0F06316D-B9AA-D448-5CA5-ED877B7B6436}"/>
+                <a16:creationId xmlns:a16="http://schemas.microsoft.com/office/drawing/2014/main" id="{C69FFD99-4B92-E634-12D4-1F3723E7C8EA}"/>
               </a:ext>
             </a:extLst>
           </p:cNvPr>
@@ -33964,7 +35228,7 @@
         </p:blipFill>
         <p:spPr>
           <a:xfrm>
-            <a:off x="6964022" y="-76844"/>
+            <a:off x="6964022" y="-96010"/>
             <a:ext cx="2381250" cy="2428875"/>
           </a:xfrm>
           <a:prstGeom prst="rect">
@@ -33977,7 +35241,7 @@
           <p:cNvPr id="7" name="Immagine 6">
             <a:extLst>
               <a:ext uri="{FF2B5EF4-FFF2-40B4-BE49-F238E27FC236}">
-                <a16:creationId xmlns:a16="http://schemas.microsoft.com/office/drawing/2014/main" id="{C38F68E3-5606-1756-F608-8D457B404E54}"/>
+                <a16:creationId xmlns:a16="http://schemas.microsoft.com/office/drawing/2014/main" id="{8A46CEFE-ACC5-73FF-9BC2-E590D5433679}"/>
               </a:ext>
             </a:extLst>
           </p:cNvPr>
@@ -33994,8 +35258,38 @@
         </p:blipFill>
         <p:spPr>
           <a:xfrm>
-            <a:off x="738186" y="6228733"/>
+            <a:off x="738186" y="6271902"/>
             <a:ext cx="7667625" cy="466725"/>
+          </a:xfrm>
+          <a:prstGeom prst="rect">
+            <a:avLst/>
+          </a:prstGeom>
+        </p:spPr>
+      </p:pic>
+      <p:pic>
+        <p:nvPicPr>
+          <p:cNvPr id="6" name="Immagine 5">
+            <a:extLst>
+              <a:ext uri="{FF2B5EF4-FFF2-40B4-BE49-F238E27FC236}">
+                <a16:creationId xmlns:a16="http://schemas.microsoft.com/office/drawing/2014/main" id="{62333A43-E877-4477-FAC7-C25317CE6605}"/>
+              </a:ext>
+            </a:extLst>
+          </p:cNvPr>
+          <p:cNvPicPr>
+            <a:picLocks noChangeAspect="1"/>
+          </p:cNvPicPr>
+          <p:nvPr/>
+        </p:nvPicPr>
+        <p:blipFill>
+          <a:blip r:embed="rId9"/>
+          <a:stretch>
+            <a:fillRect/>
+          </a:stretch>
+        </p:blipFill>
+        <p:spPr>
+          <a:xfrm>
+            <a:off x="-313" y="-29197"/>
+            <a:ext cx="7316221" cy="685896"/>
           </a:xfrm>
           <a:prstGeom prst="rect">
             <a:avLst/>
@@ -34010,7 +35304,7 @@
 </p:sld>
 </file>
 
-<file path=ppt/slides/slide13.xml><?xml version="1.0" encoding="utf-8"?>
+<file path=ppt/slides/slide14.xml><?xml version="1.0" encoding="utf-8"?>
 <p:sld xmlns:a="http://schemas.openxmlformats.org/drawingml/2006/main" xmlns:r="http://schemas.openxmlformats.org/officeDocument/2006/relationships" xmlns:p="http://schemas.openxmlformats.org/presentationml/2006/main">
   <p:cSld>
     <p:bg>
@@ -34471,7 +35765,7 @@
         </p:nvSpPr>
         <p:spPr>
           <a:xfrm>
-            <a:off x="486697" y="629267"/>
+            <a:off x="486697" y="951903"/>
             <a:ext cx="6939116" cy="1016654"/>
           </a:xfrm>
         </p:spPr>
@@ -34481,18 +35775,21 @@
           </a:bodyPr>
           <a:lstStyle/>
           <a:p>
-            <a:pPr>
-              <a:lnSpc>
-                <a:spcPct val="90000"/>
-              </a:lnSpc>
-            </a:pPr>
             <a:r>
-              <a:rPr lang="en-GB" sz="3600">
+              <a:rPr lang="en-GB" dirty="0" err="1">
                 <a:solidFill>
                   <a:srgbClr val="EBEBEB"/>
                 </a:solidFill>
               </a:rPr>
-              <a:t>Vantaggi dell'uso delle Classi</a:t>
+              <a:t>Prossimi</a:t>
+            </a:r>
+            <a:r>
+              <a:rPr lang="en-GB" dirty="0">
+                <a:solidFill>
+                  <a:srgbClr val="EBEBEB"/>
+                </a:solidFill>
+              </a:rPr>
+              <a:t> Passi</a:t>
             </a:r>
           </a:p>
         </p:txBody>
@@ -35067,1152 +36364,6 @@
           <p:cNvPr id="5" name="Content Placeholder 2">
             <a:extLst>
               <a:ext uri="{FF2B5EF4-FFF2-40B4-BE49-F238E27FC236}">
-                <a16:creationId xmlns:a16="http://schemas.microsoft.com/office/drawing/2014/main" id="{8B13C577-DCCD-0D32-2D05-46A3C3726471}"/>
-              </a:ext>
-            </a:extLst>
-          </p:cNvPr>
-          <p:cNvGraphicFramePr>
-            <a:graphicFrameLocks noGrp="1"/>
-          </p:cNvGraphicFramePr>
-          <p:nvPr>
-            <p:ph idx="1"/>
-            <p:extLst>
-              <p:ext uri="{D42A27DB-BD31-4B8C-83A1-F6EECF244321}">
-                <p14:modId xmlns:p14="http://schemas.microsoft.com/office/powerpoint/2010/main" val="2326785785"/>
-              </p:ext>
-            </p:extLst>
-          </p:nvPr>
-        </p:nvGraphicFramePr>
-        <p:xfrm>
-          <a:off x="486697" y="2810256"/>
-          <a:ext cx="8171528" cy="3404277"/>
-        </p:xfrm>
-        <a:graphic>
-          <a:graphicData uri="http://schemas.openxmlformats.org/drawingml/2006/diagram">
-            <dgm:relIds xmlns:dgm="http://schemas.openxmlformats.org/drawingml/2006/diagram" xmlns:r="http://schemas.openxmlformats.org/officeDocument/2006/relationships" r:dm="rId2" r:lo="rId3" r:qs="rId4" r:cs="rId5"/>
-          </a:graphicData>
-        </a:graphic>
-      </p:graphicFrame>
-      <p:pic>
-        <p:nvPicPr>
-          <p:cNvPr id="4" name="Immagine 3" descr="Immagine che contiene cerchio, Elementi grafici, design, schermata&#10;&#10;Il contenuto generato dall'IA potrebbe non essere corretto.">
-            <a:extLst>
-              <a:ext uri="{FF2B5EF4-FFF2-40B4-BE49-F238E27FC236}">
-                <a16:creationId xmlns:a16="http://schemas.microsoft.com/office/drawing/2014/main" id="{C69FFD99-4B92-E634-12D4-1F3723E7C8EA}"/>
-              </a:ext>
-            </a:extLst>
-          </p:cNvPr>
-          <p:cNvPicPr>
-            <a:picLocks noChangeAspect="1"/>
-          </p:cNvPicPr>
-          <p:nvPr/>
-        </p:nvPicPr>
-        <p:blipFill>
-          <a:blip r:embed="rId7"/>
-          <a:stretch>
-            <a:fillRect/>
-          </a:stretch>
-        </p:blipFill>
-        <p:spPr>
-          <a:xfrm>
-            <a:off x="6964022" y="-96010"/>
-            <a:ext cx="2381250" cy="2428875"/>
-          </a:xfrm>
-          <a:prstGeom prst="rect">
-            <a:avLst/>
-          </a:prstGeom>
-        </p:spPr>
-      </p:pic>
-      <p:pic>
-        <p:nvPicPr>
-          <p:cNvPr id="7" name="Immagine 6">
-            <a:extLst>
-              <a:ext uri="{FF2B5EF4-FFF2-40B4-BE49-F238E27FC236}">
-                <a16:creationId xmlns:a16="http://schemas.microsoft.com/office/drawing/2014/main" id="{8A46CEFE-ACC5-73FF-9BC2-E590D5433679}"/>
-              </a:ext>
-            </a:extLst>
-          </p:cNvPr>
-          <p:cNvPicPr>
-            <a:picLocks noChangeAspect="1"/>
-          </p:cNvPicPr>
-          <p:nvPr/>
-        </p:nvPicPr>
-        <p:blipFill>
-          <a:blip r:embed="rId8"/>
-          <a:stretch>
-            <a:fillRect/>
-          </a:stretch>
-        </p:blipFill>
-        <p:spPr>
-          <a:xfrm>
-            <a:off x="738186" y="6271902"/>
-            <a:ext cx="7667625" cy="466725"/>
-          </a:xfrm>
-          <a:prstGeom prst="rect">
-            <a:avLst/>
-          </a:prstGeom>
-        </p:spPr>
-      </p:pic>
-    </p:spTree>
-  </p:cSld>
-  <p:clrMapOvr>
-    <a:overrideClrMapping bg1="lt1" tx1="dk1" bg2="lt2" tx2="dk2" accent1="accent1" accent2="accent2" accent3="accent3" accent4="accent4" accent5="accent5" accent6="accent6" hlink="hlink" folHlink="folHlink"/>
-  </p:clrMapOvr>
-</p:sld>
-</file>
-
-<file path=ppt/slides/slide14.xml><?xml version="1.0" encoding="utf-8"?>
-<p:sld xmlns:a="http://schemas.openxmlformats.org/drawingml/2006/main" xmlns:r="http://schemas.openxmlformats.org/officeDocument/2006/relationships" xmlns:p="http://schemas.openxmlformats.org/presentationml/2006/main">
-  <p:cSld>
-    <p:bg>
-      <p:bgPr>
-        <a:solidFill>
-          <a:schemeClr val="bg1"/>
-        </a:solidFill>
-        <a:effectLst/>
-      </p:bgPr>
-    </p:bg>
-    <p:spTree>
-      <p:nvGrpSpPr>
-        <p:cNvPr id="1" name=""/>
-        <p:cNvGrpSpPr/>
-        <p:nvPr/>
-      </p:nvGrpSpPr>
-      <p:grpSpPr>
-        <a:xfrm>
-          <a:off x="0" y="0"/>
-          <a:ext cx="0" cy="0"/>
-          <a:chOff x="0" y="0"/>
-          <a:chExt cx="0" cy="0"/>
-        </a:xfrm>
-      </p:grpSpPr>
-      <p:sp>
-        <p:nvSpPr>
-          <p:cNvPr id="9" name="Rectangle 8">
-            <a:extLst>
-              <a:ext uri="{FF2B5EF4-FFF2-40B4-BE49-F238E27FC236}">
-                <a16:creationId xmlns:a16="http://schemas.microsoft.com/office/drawing/2014/main" id="{F747F1B4-B831-4277-8AB0-32767F7EB7BF}"/>
-              </a:ext>
-              <a:ext uri="{C183D7F6-B498-43B3-948B-1728B52AA6E4}">
-                <adec:decorative xmlns:adec="http://schemas.microsoft.com/office/drawing/2017/decorative" val="1"/>
-              </a:ext>
-            </a:extLst>
-          </p:cNvPr>
-          <p:cNvSpPr>
-            <a:spLocks noGrp="1" noRot="1" noChangeAspect="1" noMove="1" noResize="1" noEditPoints="1" noAdjustHandles="1" noChangeArrowheads="1" noChangeShapeType="1" noTextEdit="1"/>
-          </p:cNvSpPr>
-          <p:nvPr>
-            <p:extLst>
-              <p:ext uri="{386F3935-93C4-4BCD-93E2-E3B085C9AB24}">
-                <p16:designElem xmlns:p16="http://schemas.microsoft.com/office/powerpoint/2015/main" val="1"/>
-              </p:ext>
-            </p:extLst>
-          </p:nvPr>
-        </p:nvSpPr>
-        <p:spPr>
-          <a:xfrm>
-            <a:off x="0" y="0"/>
-            <a:ext cx="9143999" cy="6858000"/>
-          </a:xfrm>
-          <a:prstGeom prst="rect">
-            <a:avLst/>
-          </a:prstGeom>
-          <a:ln>
-            <a:noFill/>
-          </a:ln>
-        </p:spPr>
-        <p:style>
-          <a:lnRef idx="2">
-            <a:schemeClr val="accent1">
-              <a:shade val="50000"/>
-            </a:schemeClr>
-          </a:lnRef>
-          <a:fillRef idx="1003">
-            <a:schemeClr val="dk2"/>
-          </a:fillRef>
-          <a:effectRef idx="0">
-            <a:schemeClr val="accent1"/>
-          </a:effectRef>
-          <a:fontRef idx="minor">
-            <a:schemeClr val="lt1"/>
-          </a:fontRef>
-        </p:style>
-        <p:txBody>
-          <a:bodyPr rtlCol="0" anchor="ctr"/>
-          <a:lstStyle/>
-          <a:p>
-            <a:pPr algn="ctr"/>
-            <a:endParaRPr lang="en-US"/>
-          </a:p>
-        </p:txBody>
-      </p:sp>
-      <p:sp>
-        <p:nvSpPr>
-          <p:cNvPr id="11" name="Freeform 7">
-            <a:extLst>
-              <a:ext uri="{FF2B5EF4-FFF2-40B4-BE49-F238E27FC236}">
-                <a16:creationId xmlns:a16="http://schemas.microsoft.com/office/drawing/2014/main" id="{D80CFA21-AB7C-4BEB-9BFF-05764FBBF3C6}"/>
-              </a:ext>
-              <a:ext uri="{C183D7F6-B498-43B3-948B-1728B52AA6E4}">
-                <adec:decorative xmlns:adec="http://schemas.microsoft.com/office/drawing/2017/decorative" val="1"/>
-              </a:ext>
-            </a:extLst>
-          </p:cNvPr>
-          <p:cNvSpPr>
-            <a:spLocks noGrp="1" noRot="1" noChangeAspect="1" noMove="1" noResize="1" noEditPoints="1" noAdjustHandles="1" noChangeArrowheads="1" noChangeShapeType="1" noTextEdit="1"/>
-          </p:cNvSpPr>
-          <p:nvPr>
-            <p:extLst>
-              <p:ext uri="{386F3935-93C4-4BCD-93E2-E3B085C9AB24}">
-                <p16:designElem xmlns:p16="http://schemas.microsoft.com/office/powerpoint/2015/main" val="1"/>
-              </p:ext>
-            </p:extLst>
-          </p:nvPr>
-        </p:nvSpPr>
-        <p:spPr>
-          <a:xfrm>
-            <a:off x="6539954" y="1460230"/>
-            <a:ext cx="2604045" cy="825932"/>
-          </a:xfrm>
-          <a:custGeom>
-            <a:avLst/>
-            <a:gdLst>
-              <a:gd name="connsiteX0" fmla="*/ 3470310 w 3472060"/>
-              <a:gd name="connsiteY0" fmla="*/ 0 h 825932"/>
-              <a:gd name="connsiteX1" fmla="*/ 3472060 w 3472060"/>
-              <a:gd name="connsiteY1" fmla="*/ 12850 h 825932"/>
-              <a:gd name="connsiteX2" fmla="*/ 3472060 w 3472060"/>
-              <a:gd name="connsiteY2" fmla="*/ 480529 h 825932"/>
-              <a:gd name="connsiteX3" fmla="*/ 3363699 w 3472060"/>
-              <a:gd name="connsiteY3" fmla="*/ 498471 h 825932"/>
-              <a:gd name="connsiteX4" fmla="*/ 42060 w 3472060"/>
-              <a:gd name="connsiteY4" fmla="*/ 824486 h 825932"/>
-              <a:gd name="connsiteX5" fmla="*/ 0 w 3472060"/>
-              <a:gd name="connsiteY5" fmla="*/ 758452 h 825932"/>
-              <a:gd name="connsiteX6" fmla="*/ 188014 w 3472060"/>
-              <a:gd name="connsiteY6" fmla="*/ 735602 h 825932"/>
-              <a:gd name="connsiteX7" fmla="*/ 284087 w 3472060"/>
-              <a:gd name="connsiteY7" fmla="*/ 722590 h 825932"/>
-              <a:gd name="connsiteX8" fmla="*/ 382288 w 3472060"/>
-              <a:gd name="connsiteY8" fmla="*/ 709392 h 825932"/>
-              <a:gd name="connsiteX9" fmla="*/ 481858 w 3472060"/>
-              <a:gd name="connsiteY9" fmla="*/ 695774 h 825932"/>
-              <a:gd name="connsiteX10" fmla="*/ 581897 w 3472060"/>
-              <a:gd name="connsiteY10" fmla="*/ 680711 h 825932"/>
-              <a:gd name="connsiteX11" fmla="*/ 683670 w 3472060"/>
-              <a:gd name="connsiteY11" fmla="*/ 665256 h 825932"/>
-              <a:gd name="connsiteX12" fmla="*/ 787206 w 3472060"/>
-              <a:gd name="connsiteY12" fmla="*/ 649587 h 825932"/>
-              <a:gd name="connsiteX13" fmla="*/ 892019 w 3472060"/>
-              <a:gd name="connsiteY13" fmla="*/ 632968 h 825932"/>
-              <a:gd name="connsiteX14" fmla="*/ 997620 w 3472060"/>
-              <a:gd name="connsiteY14" fmla="*/ 614667 h 825932"/>
-              <a:gd name="connsiteX15" fmla="*/ 1104727 w 3472060"/>
-              <a:gd name="connsiteY15" fmla="*/ 596741 h 825932"/>
-              <a:gd name="connsiteX16" fmla="*/ 1212669 w 3472060"/>
-              <a:gd name="connsiteY16" fmla="*/ 577397 h 825932"/>
-              <a:gd name="connsiteX17" fmla="*/ 1321506 w 3472060"/>
-              <a:gd name="connsiteY17" fmla="*/ 556988 h 825932"/>
-              <a:gd name="connsiteX18" fmla="*/ 1430709 w 3472060"/>
-              <a:gd name="connsiteY18" fmla="*/ 536607 h 825932"/>
-              <a:gd name="connsiteX19" fmla="*/ 1541050 w 3472060"/>
-              <a:gd name="connsiteY19" fmla="*/ 514481 h 825932"/>
-              <a:gd name="connsiteX20" fmla="*/ 1652805 w 3472060"/>
-              <a:gd name="connsiteY20" fmla="*/ 492202 h 825932"/>
-              <a:gd name="connsiteX21" fmla="*/ 1763708 w 3472060"/>
-              <a:gd name="connsiteY21" fmla="*/ 469161 h 825932"/>
-              <a:gd name="connsiteX22" fmla="*/ 1875795 w 3472060"/>
-              <a:gd name="connsiteY22" fmla="*/ 444641 h 825932"/>
-              <a:gd name="connsiteX23" fmla="*/ 1989128 w 3472060"/>
-              <a:gd name="connsiteY23" fmla="*/ 418995 h 825932"/>
-              <a:gd name="connsiteX24" fmla="*/ 2102476 w 3472060"/>
-              <a:gd name="connsiteY24" fmla="*/ 393438 h 825932"/>
-              <a:gd name="connsiteX25" fmla="*/ 2215549 w 3472060"/>
-              <a:gd name="connsiteY25" fmla="*/ 366291 h 825932"/>
-              <a:gd name="connsiteX26" fmla="*/ 2330490 w 3472060"/>
-              <a:gd name="connsiteY26" fmla="*/ 337455 h 825932"/>
-              <a:gd name="connsiteX27" fmla="*/ 2443333 w 3472060"/>
-              <a:gd name="connsiteY27" fmla="*/ 308983 h 825932"/>
-              <a:gd name="connsiteX28" fmla="*/ 2558014 w 3472060"/>
-              <a:gd name="connsiteY28" fmla="*/ 278646 h 825932"/>
-              <a:gd name="connsiteX29" fmla="*/ 2673621 w 3472060"/>
-              <a:gd name="connsiteY29" fmla="*/ 247421 h 825932"/>
-              <a:gd name="connsiteX30" fmla="*/ 2787008 w 3472060"/>
-              <a:gd name="connsiteY30" fmla="*/ 215853 h 825932"/>
-              <a:gd name="connsiteX31" fmla="*/ 2901442 w 3472060"/>
-              <a:gd name="connsiteY31" fmla="*/ 182011 h 825932"/>
-              <a:gd name="connsiteX32" fmla="*/ 3015722 w 3472060"/>
-              <a:gd name="connsiteY32" fmla="*/ 147286 h 825932"/>
-              <a:gd name="connsiteX33" fmla="*/ 3130018 w 3472060"/>
-              <a:gd name="connsiteY33" fmla="*/ 112649 h 825932"/>
-              <a:gd name="connsiteX34" fmla="*/ 3243551 w 3472060"/>
-              <a:gd name="connsiteY34" fmla="*/ 75688 h 825932"/>
-              <a:gd name="connsiteX35" fmla="*/ 3356992 w 3472060"/>
-              <a:gd name="connsiteY35" fmla="*/ 38197 h 825932"/>
-              <a:gd name="connsiteX36" fmla="*/ 3470310 w 3472060"/>
-              <a:gd name="connsiteY36" fmla="*/ 0 h 825932"/>
-            </a:gdLst>
-            <a:ahLst/>
-            <a:cxnLst>
-              <a:cxn ang="0">
-                <a:pos x="connsiteX0" y="connsiteY0"/>
-              </a:cxn>
-              <a:cxn ang="0">
-                <a:pos x="connsiteX1" y="connsiteY1"/>
-              </a:cxn>
-              <a:cxn ang="0">
-                <a:pos x="connsiteX2" y="connsiteY2"/>
-              </a:cxn>
-              <a:cxn ang="0">
-                <a:pos x="connsiteX3" y="connsiteY3"/>
-              </a:cxn>
-              <a:cxn ang="0">
-                <a:pos x="connsiteX4" y="connsiteY4"/>
-              </a:cxn>
-              <a:cxn ang="0">
-                <a:pos x="connsiteX5" y="connsiteY5"/>
-              </a:cxn>
-              <a:cxn ang="0">
-                <a:pos x="connsiteX6" y="connsiteY6"/>
-              </a:cxn>
-              <a:cxn ang="0">
-                <a:pos x="connsiteX7" y="connsiteY7"/>
-              </a:cxn>
-              <a:cxn ang="0">
-                <a:pos x="connsiteX8" y="connsiteY8"/>
-              </a:cxn>
-              <a:cxn ang="0">
-                <a:pos x="connsiteX9" y="connsiteY9"/>
-              </a:cxn>
-              <a:cxn ang="0">
-                <a:pos x="connsiteX10" y="connsiteY10"/>
-              </a:cxn>
-              <a:cxn ang="0">
-                <a:pos x="connsiteX11" y="connsiteY11"/>
-              </a:cxn>
-              <a:cxn ang="0">
-                <a:pos x="connsiteX12" y="connsiteY12"/>
-              </a:cxn>
-              <a:cxn ang="0">
-                <a:pos x="connsiteX13" y="connsiteY13"/>
-              </a:cxn>
-              <a:cxn ang="0">
-                <a:pos x="connsiteX14" y="connsiteY14"/>
-              </a:cxn>
-              <a:cxn ang="0">
-                <a:pos x="connsiteX15" y="connsiteY15"/>
-              </a:cxn>
-              <a:cxn ang="0">
-                <a:pos x="connsiteX16" y="connsiteY16"/>
-              </a:cxn>
-              <a:cxn ang="0">
-                <a:pos x="connsiteX17" y="connsiteY17"/>
-              </a:cxn>
-              <a:cxn ang="0">
-                <a:pos x="connsiteX18" y="connsiteY18"/>
-              </a:cxn>
-              <a:cxn ang="0">
-                <a:pos x="connsiteX19" y="connsiteY19"/>
-              </a:cxn>
-              <a:cxn ang="0">
-                <a:pos x="connsiteX20" y="connsiteY20"/>
-              </a:cxn>
-              <a:cxn ang="0">
-                <a:pos x="connsiteX21" y="connsiteY21"/>
-              </a:cxn>
-              <a:cxn ang="0">
-                <a:pos x="connsiteX22" y="connsiteY22"/>
-              </a:cxn>
-              <a:cxn ang="0">
-                <a:pos x="connsiteX23" y="connsiteY23"/>
-              </a:cxn>
-              <a:cxn ang="0">
-                <a:pos x="connsiteX24" y="connsiteY24"/>
-              </a:cxn>
-              <a:cxn ang="0">
-                <a:pos x="connsiteX25" y="connsiteY25"/>
-              </a:cxn>
-              <a:cxn ang="0">
-                <a:pos x="connsiteX26" y="connsiteY26"/>
-              </a:cxn>
-              <a:cxn ang="0">
-                <a:pos x="connsiteX27" y="connsiteY27"/>
-              </a:cxn>
-              <a:cxn ang="0">
-                <a:pos x="connsiteX28" y="connsiteY28"/>
-              </a:cxn>
-              <a:cxn ang="0">
-                <a:pos x="connsiteX29" y="connsiteY29"/>
-              </a:cxn>
-              <a:cxn ang="0">
-                <a:pos x="connsiteX30" y="connsiteY30"/>
-              </a:cxn>
-              <a:cxn ang="0">
-                <a:pos x="connsiteX31" y="connsiteY31"/>
-              </a:cxn>
-              <a:cxn ang="0">
-                <a:pos x="connsiteX32" y="connsiteY32"/>
-              </a:cxn>
-              <a:cxn ang="0">
-                <a:pos x="connsiteX33" y="connsiteY33"/>
-              </a:cxn>
-              <a:cxn ang="0">
-                <a:pos x="connsiteX34" y="connsiteY34"/>
-              </a:cxn>
-              <a:cxn ang="0">
-                <a:pos x="connsiteX35" y="connsiteY35"/>
-              </a:cxn>
-              <a:cxn ang="0">
-                <a:pos x="connsiteX36" y="connsiteY36"/>
-              </a:cxn>
-            </a:cxnLst>
-            <a:rect l="l" t="t" r="r" b="b"/>
-            <a:pathLst>
-              <a:path w="3472060" h="825932">
-                <a:moveTo>
-                  <a:pt x="3470310" y="0"/>
-                </a:moveTo>
-                <a:lnTo>
-                  <a:pt x="3472060" y="12850"/>
-                </a:lnTo>
-                <a:lnTo>
-                  <a:pt x="3472060" y="480529"/>
-                </a:lnTo>
-                <a:lnTo>
-                  <a:pt x="3363699" y="498471"/>
-                </a:lnTo>
-                <a:cubicBezTo>
-                  <a:pt x="2435623" y="645518"/>
-                  <a:pt x="603076" y="844866"/>
-                  <a:pt x="42060" y="824486"/>
-                </a:cubicBezTo>
-                <a:cubicBezTo>
-                  <a:pt x="28151" y="802425"/>
-                  <a:pt x="13909" y="780513"/>
-                  <a:pt x="0" y="758452"/>
-                </a:cubicBezTo>
-                <a:lnTo>
-                  <a:pt x="188014" y="735602"/>
-                </a:lnTo>
-                <a:lnTo>
-                  <a:pt x="284087" y="722590"/>
-                </a:lnTo>
-                <a:lnTo>
-                  <a:pt x="382288" y="709392"/>
-                </a:lnTo>
-                <a:lnTo>
-                  <a:pt x="481858" y="695774"/>
-                </a:lnTo>
-                <a:lnTo>
-                  <a:pt x="581897" y="680711"/>
-                </a:lnTo>
-                <a:lnTo>
-                  <a:pt x="683670" y="665256"/>
-                </a:lnTo>
-                <a:lnTo>
-                  <a:pt x="787206" y="649587"/>
-                </a:lnTo>
-                <a:lnTo>
-                  <a:pt x="892019" y="632968"/>
-                </a:lnTo>
-                <a:lnTo>
-                  <a:pt x="997620" y="614667"/>
-                </a:lnTo>
-                <a:lnTo>
-                  <a:pt x="1104727" y="596741"/>
-                </a:lnTo>
-                <a:lnTo>
-                  <a:pt x="1212669" y="577397"/>
-                </a:lnTo>
-                <a:lnTo>
-                  <a:pt x="1321506" y="556988"/>
-                </a:lnTo>
-                <a:lnTo>
-                  <a:pt x="1430709" y="536607"/>
-                </a:lnTo>
-                <a:lnTo>
-                  <a:pt x="1541050" y="514481"/>
-                </a:lnTo>
-                <a:lnTo>
-                  <a:pt x="1652805" y="492202"/>
-                </a:lnTo>
-                <a:lnTo>
-                  <a:pt x="1763708" y="469161"/>
-                </a:lnTo>
-                <a:lnTo>
-                  <a:pt x="1875795" y="444641"/>
-                </a:lnTo>
-                <a:lnTo>
-                  <a:pt x="1989128" y="418995"/>
-                </a:lnTo>
-                <a:lnTo>
-                  <a:pt x="2102476" y="393438"/>
-                </a:lnTo>
-                <a:lnTo>
-                  <a:pt x="2215549" y="366291"/>
-                </a:lnTo>
-                <a:lnTo>
-                  <a:pt x="2330490" y="337455"/>
-                </a:lnTo>
-                <a:lnTo>
-                  <a:pt x="2443333" y="308983"/>
-                </a:lnTo>
-                <a:lnTo>
-                  <a:pt x="2558014" y="278646"/>
-                </a:lnTo>
-                <a:lnTo>
-                  <a:pt x="2673621" y="247421"/>
-                </a:lnTo>
-                <a:lnTo>
-                  <a:pt x="2787008" y="215853"/>
-                </a:lnTo>
-                <a:lnTo>
-                  <a:pt x="2901442" y="182011"/>
-                </a:lnTo>
-                <a:lnTo>
-                  <a:pt x="3015722" y="147286"/>
-                </a:lnTo>
-                <a:lnTo>
-                  <a:pt x="3130018" y="112649"/>
-                </a:lnTo>
-                <a:lnTo>
-                  <a:pt x="3243551" y="75688"/>
-                </a:lnTo>
-                <a:lnTo>
-                  <a:pt x="3356992" y="38197"/>
-                </a:lnTo>
-                <a:lnTo>
-                  <a:pt x="3470310" y="0"/>
-                </a:lnTo>
-                <a:close/>
-              </a:path>
-            </a:pathLst>
-          </a:custGeom>
-          <a:solidFill>
-            <a:schemeClr val="bg1">
-              <a:alpha val="20000"/>
-            </a:schemeClr>
-          </a:solidFill>
-          <a:ln>
-            <a:noFill/>
-          </a:ln>
-        </p:spPr>
-        <p:txBody>
-          <a:bodyPr rtlCol="0" anchor="ctr"/>
-          <a:lstStyle/>
-          <a:p>
-            <a:pPr algn="ctr"/>
-            <a:endParaRPr lang="en-US">
-              <a:solidFill>
-                <a:schemeClr val="tx1"/>
-              </a:solidFill>
-            </a:endParaRPr>
-          </a:p>
-        </p:txBody>
-      </p:sp>
-      <p:sp>
-        <p:nvSpPr>
-          <p:cNvPr id="2" name="Title 1"/>
-          <p:cNvSpPr>
-            <a:spLocks noGrp="1"/>
-          </p:cNvSpPr>
-          <p:nvPr>
-            <p:ph type="title"/>
-          </p:nvPr>
-        </p:nvSpPr>
-        <p:spPr>
-          <a:xfrm>
-            <a:off x="486697" y="629267"/>
-            <a:ext cx="6939116" cy="1016654"/>
-          </a:xfrm>
-        </p:spPr>
-        <p:txBody>
-          <a:bodyPr>
-            <a:normAutofit/>
-          </a:bodyPr>
-          <a:lstStyle/>
-          <a:p>
-            <a:r>
-              <a:rPr lang="en-GB">
-                <a:solidFill>
-                  <a:srgbClr val="EBEBEB"/>
-                </a:solidFill>
-              </a:rPr>
-              <a:t>Prossimi Passi</a:t>
-            </a:r>
-          </a:p>
-        </p:txBody>
-      </p:sp>
-      <p:sp>
-        <p:nvSpPr>
-          <p:cNvPr id="13" name="Rectangle 12">
-            <a:extLst>
-              <a:ext uri="{FF2B5EF4-FFF2-40B4-BE49-F238E27FC236}">
-                <a16:creationId xmlns:a16="http://schemas.microsoft.com/office/drawing/2014/main" id="{12F7E335-851A-4CAE-B09F-E657819D4600}"/>
-              </a:ext>
-              <a:ext uri="{C183D7F6-B498-43B3-948B-1728B52AA6E4}">
-                <adec:decorative xmlns:adec="http://schemas.microsoft.com/office/drawing/2017/decorative" val="1"/>
-              </a:ext>
-            </a:extLst>
-          </p:cNvPr>
-          <p:cNvSpPr>
-            <a:spLocks noGrp="1" noRot="1" noChangeAspect="1" noMove="1" noResize="1" noEditPoints="1" noAdjustHandles="1" noChangeArrowheads="1" noChangeShapeType="1" noTextEdit="1"/>
-          </p:cNvSpPr>
-          <p:nvPr>
-            <p:extLst>
-              <p:ext uri="{386F3935-93C4-4BCD-93E2-E3B085C9AB24}">
-                <p16:designElem xmlns:p16="http://schemas.microsoft.com/office/powerpoint/2015/main" val="1"/>
-              </p:ext>
-            </p:extLst>
-          </p:nvPr>
-        </p:nvSpPr>
-        <p:spPr>
-          <a:xfrm>
-            <a:off x="7828359" y="0"/>
-            <a:ext cx="514350" cy="1143000"/>
-          </a:xfrm>
-          <a:prstGeom prst="rect">
-            <a:avLst/>
-          </a:prstGeom>
-          <a:solidFill>
-            <a:schemeClr val="accent1"/>
-          </a:solidFill>
-          <a:ln>
-            <a:noFill/>
-          </a:ln>
-        </p:spPr>
-        <p:style>
-          <a:lnRef idx="1">
-            <a:schemeClr val="accent1"/>
-          </a:lnRef>
-          <a:fillRef idx="3">
-            <a:schemeClr val="accent1"/>
-          </a:fillRef>
-          <a:effectRef idx="2">
-            <a:schemeClr val="accent1"/>
-          </a:effectRef>
-          <a:fontRef idx="minor">
-            <a:schemeClr val="lt1"/>
-          </a:fontRef>
-        </p:style>
-        <p:txBody>
-          <a:bodyPr/>
-          <a:lstStyle/>
-          <a:p>
-            <a:endParaRPr lang="en-GB"/>
-          </a:p>
-        </p:txBody>
-      </p:sp>
-      <p:sp>
-        <p:nvSpPr>
-          <p:cNvPr id="15" name="Freeform: Shape 14">
-            <a:extLst>
-              <a:ext uri="{FF2B5EF4-FFF2-40B4-BE49-F238E27FC236}">
-                <a16:creationId xmlns:a16="http://schemas.microsoft.com/office/drawing/2014/main" id="{10B541F0-7F6E-402E-84D8-CF96EACA5FBC}"/>
-              </a:ext>
-              <a:ext uri="{C183D7F6-B498-43B3-948B-1728B52AA6E4}">
-                <adec:decorative xmlns:adec="http://schemas.microsoft.com/office/drawing/2017/decorative" val="1"/>
-              </a:ext>
-            </a:extLst>
-          </p:cNvPr>
-          <p:cNvSpPr>
-            <a:spLocks noGrp="1" noRot="1" noChangeAspect="1" noMove="1" noResize="1" noEditPoints="1" noAdjustHandles="1" noChangeArrowheads="1" noChangeShapeType="1" noTextEdit="1"/>
-          </p:cNvSpPr>
-          <p:nvPr>
-            <p:extLst>
-              <p:ext uri="{386F3935-93C4-4BCD-93E2-E3B085C9AB24}">
-                <p16:designElem xmlns:p16="http://schemas.microsoft.com/office/powerpoint/2015/main" val="1"/>
-              </p:ext>
-            </p:extLst>
-          </p:nvPr>
-        </p:nvSpPr>
-        <p:spPr bwMode="gray">
-          <a:xfrm>
-            <a:off x="0" y="1762067"/>
-            <a:ext cx="9144312" cy="5095933"/>
-          </a:xfrm>
-          <a:custGeom>
-            <a:avLst/>
-            <a:gdLst>
-              <a:gd name="connsiteX0" fmla="*/ 1 w 12192418"/>
-              <a:gd name="connsiteY0" fmla="*/ 0 h 5095933"/>
-              <a:gd name="connsiteX1" fmla="*/ 71932 w 12192418"/>
-              <a:gd name="connsiteY1" fmla="*/ 12261 h 5095933"/>
-              <a:gd name="connsiteX2" fmla="*/ 282849 w 12192418"/>
-              <a:gd name="connsiteY2" fmla="*/ 48343 h 5095933"/>
-              <a:gd name="connsiteX3" fmla="*/ 436464 w 12192418"/>
-              <a:gd name="connsiteY3" fmla="*/ 73565 h 5095933"/>
-              <a:gd name="connsiteX4" fmla="*/ 619339 w 12192418"/>
-              <a:gd name="connsiteY4" fmla="*/ 100188 h 5095933"/>
-              <a:gd name="connsiteX5" fmla="*/ 836351 w 12192418"/>
-              <a:gd name="connsiteY5" fmla="*/ 132066 h 5095933"/>
-              <a:gd name="connsiteX6" fmla="*/ 1076528 w 12192418"/>
-              <a:gd name="connsiteY6" fmla="*/ 165696 h 5095933"/>
-              <a:gd name="connsiteX7" fmla="*/ 1347184 w 12192418"/>
-              <a:gd name="connsiteY7" fmla="*/ 201077 h 5095933"/>
-              <a:gd name="connsiteX8" fmla="*/ 1642223 w 12192418"/>
-              <a:gd name="connsiteY8" fmla="*/ 238560 h 5095933"/>
-              <a:gd name="connsiteX9" fmla="*/ 1962864 w 12192418"/>
-              <a:gd name="connsiteY9" fmla="*/ 276043 h 5095933"/>
-              <a:gd name="connsiteX10" fmla="*/ 2304232 w 12192418"/>
-              <a:gd name="connsiteY10" fmla="*/ 314227 h 5095933"/>
-              <a:gd name="connsiteX11" fmla="*/ 2672421 w 12192418"/>
-              <a:gd name="connsiteY11" fmla="*/ 349608 h 5095933"/>
-              <a:gd name="connsiteX12" fmla="*/ 3057678 w 12192418"/>
-              <a:gd name="connsiteY12" fmla="*/ 383588 h 5095933"/>
-              <a:gd name="connsiteX13" fmla="*/ 3464881 w 12192418"/>
-              <a:gd name="connsiteY13" fmla="*/ 414415 h 5095933"/>
-              <a:gd name="connsiteX14" fmla="*/ 3889152 w 12192418"/>
-              <a:gd name="connsiteY14" fmla="*/ 443841 h 5095933"/>
-              <a:gd name="connsiteX15" fmla="*/ 4331710 w 12192418"/>
-              <a:gd name="connsiteY15" fmla="*/ 471515 h 5095933"/>
-              <a:gd name="connsiteX16" fmla="*/ 4558476 w 12192418"/>
-              <a:gd name="connsiteY16" fmla="*/ 481324 h 5095933"/>
-              <a:gd name="connsiteX17" fmla="*/ 4790118 w 12192418"/>
-              <a:gd name="connsiteY17" fmla="*/ 492183 h 5095933"/>
-              <a:gd name="connsiteX18" fmla="*/ 5025418 w 12192418"/>
-              <a:gd name="connsiteY18" fmla="*/ 502342 h 5095933"/>
-              <a:gd name="connsiteX19" fmla="*/ 5261937 w 12192418"/>
-              <a:gd name="connsiteY19" fmla="*/ 508998 h 5095933"/>
-              <a:gd name="connsiteX20" fmla="*/ 5503332 w 12192418"/>
-              <a:gd name="connsiteY20" fmla="*/ 514953 h 5095933"/>
-              <a:gd name="connsiteX21" fmla="*/ 5747167 w 12192418"/>
-              <a:gd name="connsiteY21" fmla="*/ 521259 h 5095933"/>
-              <a:gd name="connsiteX22" fmla="*/ 5995877 w 12192418"/>
-              <a:gd name="connsiteY22" fmla="*/ 525463 h 5095933"/>
-              <a:gd name="connsiteX23" fmla="*/ 6247026 w 12192418"/>
-              <a:gd name="connsiteY23" fmla="*/ 525463 h 5095933"/>
-              <a:gd name="connsiteX24" fmla="*/ 6500613 w 12192418"/>
-              <a:gd name="connsiteY24" fmla="*/ 527565 h 5095933"/>
-              <a:gd name="connsiteX25" fmla="*/ 6756639 w 12192418"/>
-              <a:gd name="connsiteY25" fmla="*/ 525463 h 5095933"/>
-              <a:gd name="connsiteX26" fmla="*/ 7016322 w 12192418"/>
-              <a:gd name="connsiteY26" fmla="*/ 521259 h 5095933"/>
-              <a:gd name="connsiteX27" fmla="*/ 7276005 w 12192418"/>
-              <a:gd name="connsiteY27" fmla="*/ 517406 h 5095933"/>
-              <a:gd name="connsiteX28" fmla="*/ 7539345 w 12192418"/>
-              <a:gd name="connsiteY28" fmla="*/ 508998 h 5095933"/>
-              <a:gd name="connsiteX29" fmla="*/ 7805124 w 12192418"/>
-              <a:gd name="connsiteY29" fmla="*/ 500241 h 5095933"/>
-              <a:gd name="connsiteX30" fmla="*/ 8070903 w 12192418"/>
-              <a:gd name="connsiteY30" fmla="*/ 490082 h 5095933"/>
-              <a:gd name="connsiteX31" fmla="*/ 8339121 w 12192418"/>
-              <a:gd name="connsiteY31" fmla="*/ 475719 h 5095933"/>
-              <a:gd name="connsiteX32" fmla="*/ 8609776 w 12192418"/>
-              <a:gd name="connsiteY32" fmla="*/ 458554 h 5095933"/>
-              <a:gd name="connsiteX33" fmla="*/ 8881651 w 12192418"/>
-              <a:gd name="connsiteY33" fmla="*/ 442089 h 5095933"/>
-              <a:gd name="connsiteX34" fmla="*/ 9153526 w 12192418"/>
-              <a:gd name="connsiteY34" fmla="*/ 421071 h 5095933"/>
-              <a:gd name="connsiteX35" fmla="*/ 9429058 w 12192418"/>
-              <a:gd name="connsiteY35" fmla="*/ 395849 h 5095933"/>
-              <a:gd name="connsiteX36" fmla="*/ 9700933 w 12192418"/>
-              <a:gd name="connsiteY36" fmla="*/ 370626 h 5095933"/>
-              <a:gd name="connsiteX37" fmla="*/ 9977684 w 12192418"/>
-              <a:gd name="connsiteY37" fmla="*/ 341551 h 5095933"/>
-              <a:gd name="connsiteX38" fmla="*/ 10255655 w 12192418"/>
-              <a:gd name="connsiteY38" fmla="*/ 309673 h 5095933"/>
-              <a:gd name="connsiteX39" fmla="*/ 10529968 w 12192418"/>
-              <a:gd name="connsiteY39" fmla="*/ 276043 h 5095933"/>
-              <a:gd name="connsiteX40" fmla="*/ 10807939 w 12192418"/>
-              <a:gd name="connsiteY40" fmla="*/ 236809 h 5095933"/>
-              <a:gd name="connsiteX41" fmla="*/ 11084690 w 12192418"/>
-              <a:gd name="connsiteY41" fmla="*/ 194772 h 5095933"/>
-              <a:gd name="connsiteX42" fmla="*/ 11362661 w 12192418"/>
-              <a:gd name="connsiteY42" fmla="*/ 153085 h 5095933"/>
-              <a:gd name="connsiteX43" fmla="*/ 11639412 w 12192418"/>
-              <a:gd name="connsiteY43" fmla="*/ 104392 h 5095933"/>
-              <a:gd name="connsiteX44" fmla="*/ 11914945 w 12192418"/>
-              <a:gd name="connsiteY44" fmla="*/ 54648 h 5095933"/>
-              <a:gd name="connsiteX45" fmla="*/ 12191696 w 12192418"/>
-              <a:gd name="connsiteY45" fmla="*/ 2452 h 5095933"/>
-              <a:gd name="connsiteX46" fmla="*/ 12191696 w 12192418"/>
-              <a:gd name="connsiteY46" fmla="*/ 2109542 h 5095933"/>
-              <a:gd name="connsiteX47" fmla="*/ 12191999 w 12192418"/>
-              <a:gd name="connsiteY47" fmla="*/ 2109542 h 5095933"/>
-              <a:gd name="connsiteX48" fmla="*/ 12191999 w 12192418"/>
-              <a:gd name="connsiteY48" fmla="*/ 2802467 h 5095933"/>
-              <a:gd name="connsiteX49" fmla="*/ 12192418 w 12192418"/>
-              <a:gd name="connsiteY49" fmla="*/ 2802467 h 5095933"/>
-              <a:gd name="connsiteX50" fmla="*/ 12192418 w 12192418"/>
-              <a:gd name="connsiteY50" fmla="*/ 5095933 h 5095933"/>
-              <a:gd name="connsiteX51" fmla="*/ 1 w 12192418"/>
-              <a:gd name="connsiteY51" fmla="*/ 5095933 h 5095933"/>
-              <a:gd name="connsiteX52" fmla="*/ 1 w 12192418"/>
-              <a:gd name="connsiteY52" fmla="*/ 4074529 h 5095933"/>
-              <a:gd name="connsiteX53" fmla="*/ 0 w 12192418"/>
-              <a:gd name="connsiteY53" fmla="*/ 4074529 h 5095933"/>
-              <a:gd name="connsiteX54" fmla="*/ 0 w 12192418"/>
-              <a:gd name="connsiteY54" fmla="*/ 2109542 h 5095933"/>
-              <a:gd name="connsiteX55" fmla="*/ 1 w 12192418"/>
-              <a:gd name="connsiteY55" fmla="*/ 2109542 h 5095933"/>
-            </a:gdLst>
-            <a:ahLst/>
-            <a:cxnLst>
-              <a:cxn ang="0">
-                <a:pos x="connsiteX0" y="connsiteY0"/>
-              </a:cxn>
-              <a:cxn ang="0">
-                <a:pos x="connsiteX1" y="connsiteY1"/>
-              </a:cxn>
-              <a:cxn ang="0">
-                <a:pos x="connsiteX2" y="connsiteY2"/>
-              </a:cxn>
-              <a:cxn ang="0">
-                <a:pos x="connsiteX3" y="connsiteY3"/>
-              </a:cxn>
-              <a:cxn ang="0">
-                <a:pos x="connsiteX4" y="connsiteY4"/>
-              </a:cxn>
-              <a:cxn ang="0">
-                <a:pos x="connsiteX5" y="connsiteY5"/>
-              </a:cxn>
-              <a:cxn ang="0">
-                <a:pos x="connsiteX6" y="connsiteY6"/>
-              </a:cxn>
-              <a:cxn ang="0">
-                <a:pos x="connsiteX7" y="connsiteY7"/>
-              </a:cxn>
-              <a:cxn ang="0">
-                <a:pos x="connsiteX8" y="connsiteY8"/>
-              </a:cxn>
-              <a:cxn ang="0">
-                <a:pos x="connsiteX9" y="connsiteY9"/>
-              </a:cxn>
-              <a:cxn ang="0">
-                <a:pos x="connsiteX10" y="connsiteY10"/>
-              </a:cxn>
-              <a:cxn ang="0">
-                <a:pos x="connsiteX11" y="connsiteY11"/>
-              </a:cxn>
-              <a:cxn ang="0">
-                <a:pos x="connsiteX12" y="connsiteY12"/>
-              </a:cxn>
-              <a:cxn ang="0">
-                <a:pos x="connsiteX13" y="connsiteY13"/>
-              </a:cxn>
-              <a:cxn ang="0">
-                <a:pos x="connsiteX14" y="connsiteY14"/>
-              </a:cxn>
-              <a:cxn ang="0">
-                <a:pos x="connsiteX15" y="connsiteY15"/>
-              </a:cxn>
-              <a:cxn ang="0">
-                <a:pos x="connsiteX16" y="connsiteY16"/>
-              </a:cxn>
-              <a:cxn ang="0">
-                <a:pos x="connsiteX17" y="connsiteY17"/>
-              </a:cxn>
-              <a:cxn ang="0">
-                <a:pos x="connsiteX18" y="connsiteY18"/>
-              </a:cxn>
-              <a:cxn ang="0">
-                <a:pos x="connsiteX19" y="connsiteY19"/>
-              </a:cxn>
-              <a:cxn ang="0">
-                <a:pos x="connsiteX20" y="connsiteY20"/>
-              </a:cxn>
-              <a:cxn ang="0">
-                <a:pos x="connsiteX21" y="connsiteY21"/>
-              </a:cxn>
-              <a:cxn ang="0">
-                <a:pos x="connsiteX22" y="connsiteY22"/>
-              </a:cxn>
-              <a:cxn ang="0">
-                <a:pos x="connsiteX23" y="connsiteY23"/>
-              </a:cxn>
-              <a:cxn ang="0">
-                <a:pos x="connsiteX24" y="connsiteY24"/>
-              </a:cxn>
-              <a:cxn ang="0">
-                <a:pos x="connsiteX25" y="connsiteY25"/>
-              </a:cxn>
-              <a:cxn ang="0">
-                <a:pos x="connsiteX26" y="connsiteY26"/>
-              </a:cxn>
-              <a:cxn ang="0">
-                <a:pos x="connsiteX27" y="connsiteY27"/>
-              </a:cxn>
-              <a:cxn ang="0">
-                <a:pos x="connsiteX28" y="connsiteY28"/>
-              </a:cxn>
-              <a:cxn ang="0">
-                <a:pos x="connsiteX29" y="connsiteY29"/>
-              </a:cxn>
-              <a:cxn ang="0">
-                <a:pos x="connsiteX30" y="connsiteY30"/>
-              </a:cxn>
-              <a:cxn ang="0">
-                <a:pos x="connsiteX31" y="connsiteY31"/>
-              </a:cxn>
-              <a:cxn ang="0">
-                <a:pos x="connsiteX32" y="connsiteY32"/>
-              </a:cxn>
-              <a:cxn ang="0">
-                <a:pos x="connsiteX33" y="connsiteY33"/>
-              </a:cxn>
-              <a:cxn ang="0">
-                <a:pos x="connsiteX34" y="connsiteY34"/>
-              </a:cxn>
-              <a:cxn ang="0">
-                <a:pos x="connsiteX35" y="connsiteY35"/>
-              </a:cxn>
-              <a:cxn ang="0">
-                <a:pos x="connsiteX36" y="connsiteY36"/>
-              </a:cxn>
-              <a:cxn ang="0">
-                <a:pos x="connsiteX37" y="connsiteY37"/>
-              </a:cxn>
-              <a:cxn ang="0">
-                <a:pos x="connsiteX38" y="connsiteY38"/>
-              </a:cxn>
-              <a:cxn ang="0">
-                <a:pos x="connsiteX39" y="connsiteY39"/>
-              </a:cxn>
-              <a:cxn ang="0">
-                <a:pos x="connsiteX40" y="connsiteY40"/>
-              </a:cxn>
-              <a:cxn ang="0">
-                <a:pos x="connsiteX41" y="connsiteY41"/>
-              </a:cxn>
-              <a:cxn ang="0">
-                <a:pos x="connsiteX42" y="connsiteY42"/>
-              </a:cxn>
-              <a:cxn ang="0">
-                <a:pos x="connsiteX43" y="connsiteY43"/>
-              </a:cxn>
-              <a:cxn ang="0">
-                <a:pos x="connsiteX44" y="connsiteY44"/>
-              </a:cxn>
-              <a:cxn ang="0">
-                <a:pos x="connsiteX45" y="connsiteY45"/>
-              </a:cxn>
-              <a:cxn ang="0">
-                <a:pos x="connsiteX46" y="connsiteY46"/>
-              </a:cxn>
-              <a:cxn ang="0">
-                <a:pos x="connsiteX47" y="connsiteY47"/>
-              </a:cxn>
-              <a:cxn ang="0">
-                <a:pos x="connsiteX48" y="connsiteY48"/>
-              </a:cxn>
-              <a:cxn ang="0">
-                <a:pos x="connsiteX49" y="connsiteY49"/>
-              </a:cxn>
-              <a:cxn ang="0">
-                <a:pos x="connsiteX50" y="connsiteY50"/>
-              </a:cxn>
-              <a:cxn ang="0">
-                <a:pos x="connsiteX51" y="connsiteY51"/>
-              </a:cxn>
-              <a:cxn ang="0">
-                <a:pos x="connsiteX52" y="connsiteY52"/>
-              </a:cxn>
-              <a:cxn ang="0">
-                <a:pos x="connsiteX53" y="connsiteY53"/>
-              </a:cxn>
-              <a:cxn ang="0">
-                <a:pos x="connsiteX54" y="connsiteY54"/>
-              </a:cxn>
-              <a:cxn ang="0">
-                <a:pos x="connsiteX55" y="connsiteY55"/>
-              </a:cxn>
-            </a:cxnLst>
-            <a:rect l="l" t="t" r="r" b="b"/>
-            <a:pathLst>
-              <a:path w="12192418" h="5095933">
-                <a:moveTo>
-                  <a:pt x="1" y="0"/>
-                </a:moveTo>
-                <a:lnTo>
-                  <a:pt x="71932" y="12261"/>
-                </a:lnTo>
-                <a:lnTo>
-                  <a:pt x="282849" y="48343"/>
-                </a:lnTo>
-                <a:lnTo>
-                  <a:pt x="436464" y="73565"/>
-                </a:lnTo>
-                <a:lnTo>
-                  <a:pt x="619339" y="100188"/>
-                </a:lnTo>
-                <a:lnTo>
-                  <a:pt x="836351" y="132066"/>
-                </a:lnTo>
-                <a:lnTo>
-                  <a:pt x="1076528" y="165696"/>
-                </a:lnTo>
-                <a:lnTo>
-                  <a:pt x="1347184" y="201077"/>
-                </a:lnTo>
-                <a:lnTo>
-                  <a:pt x="1642223" y="238560"/>
-                </a:lnTo>
-                <a:lnTo>
-                  <a:pt x="1962864" y="276043"/>
-                </a:lnTo>
-                <a:lnTo>
-                  <a:pt x="2304232" y="314227"/>
-                </a:lnTo>
-                <a:lnTo>
-                  <a:pt x="2672421" y="349608"/>
-                </a:lnTo>
-                <a:lnTo>
-                  <a:pt x="3057678" y="383588"/>
-                </a:lnTo>
-                <a:lnTo>
-                  <a:pt x="3464881" y="414415"/>
-                </a:lnTo>
-                <a:lnTo>
-                  <a:pt x="3889152" y="443841"/>
-                </a:lnTo>
-                <a:lnTo>
-                  <a:pt x="4331710" y="471515"/>
-                </a:lnTo>
-                <a:lnTo>
-                  <a:pt x="4558476" y="481324"/>
-                </a:lnTo>
-                <a:lnTo>
-                  <a:pt x="4790118" y="492183"/>
-                </a:lnTo>
-                <a:lnTo>
-                  <a:pt x="5025418" y="502342"/>
-                </a:lnTo>
-                <a:lnTo>
-                  <a:pt x="5261937" y="508998"/>
-                </a:lnTo>
-                <a:lnTo>
-                  <a:pt x="5503332" y="514953"/>
-                </a:lnTo>
-                <a:lnTo>
-                  <a:pt x="5747167" y="521259"/>
-                </a:lnTo>
-                <a:lnTo>
-                  <a:pt x="5995877" y="525463"/>
-                </a:lnTo>
-                <a:lnTo>
-                  <a:pt x="6247026" y="525463"/>
-                </a:lnTo>
-                <a:lnTo>
-                  <a:pt x="6500613" y="527565"/>
-                </a:lnTo>
-                <a:lnTo>
-                  <a:pt x="6756639" y="525463"/>
-                </a:lnTo>
-                <a:lnTo>
-                  <a:pt x="7016322" y="521259"/>
-                </a:lnTo>
-                <a:lnTo>
-                  <a:pt x="7276005" y="517406"/>
-                </a:lnTo>
-                <a:lnTo>
-                  <a:pt x="7539345" y="508998"/>
-                </a:lnTo>
-                <a:lnTo>
-                  <a:pt x="7805124" y="500241"/>
-                </a:lnTo>
-                <a:lnTo>
-                  <a:pt x="8070903" y="490082"/>
-                </a:lnTo>
-                <a:lnTo>
-                  <a:pt x="8339121" y="475719"/>
-                </a:lnTo>
-                <a:lnTo>
-                  <a:pt x="8609776" y="458554"/>
-                </a:lnTo>
-                <a:lnTo>
-                  <a:pt x="8881651" y="442089"/>
-                </a:lnTo>
-                <a:lnTo>
-                  <a:pt x="9153526" y="421071"/>
-                </a:lnTo>
-                <a:lnTo>
-                  <a:pt x="9429058" y="395849"/>
-                </a:lnTo>
-                <a:lnTo>
-                  <a:pt x="9700933" y="370626"/>
-                </a:lnTo>
-                <a:lnTo>
-                  <a:pt x="9977684" y="341551"/>
-                </a:lnTo>
-                <a:lnTo>
-                  <a:pt x="10255655" y="309673"/>
-                </a:lnTo>
-                <a:lnTo>
-                  <a:pt x="10529968" y="276043"/>
-                </a:lnTo>
-                <a:lnTo>
-                  <a:pt x="10807939" y="236809"/>
-                </a:lnTo>
-                <a:lnTo>
-                  <a:pt x="11084690" y="194772"/>
-                </a:lnTo>
-                <a:lnTo>
-                  <a:pt x="11362661" y="153085"/>
-                </a:lnTo>
-                <a:lnTo>
-                  <a:pt x="11639412" y="104392"/>
-                </a:lnTo>
-                <a:lnTo>
-                  <a:pt x="11914945" y="54648"/>
-                </a:lnTo>
-                <a:lnTo>
-                  <a:pt x="12191696" y="2452"/>
-                </a:lnTo>
-                <a:lnTo>
-                  <a:pt x="12191696" y="2109542"/>
-                </a:lnTo>
-                <a:lnTo>
-                  <a:pt x="12191999" y="2109542"/>
-                </a:lnTo>
-                <a:lnTo>
-                  <a:pt x="12191999" y="2802467"/>
-                </a:lnTo>
-                <a:lnTo>
-                  <a:pt x="12192418" y="2802467"/>
-                </a:lnTo>
-                <a:lnTo>
-                  <a:pt x="12192418" y="5095933"/>
-                </a:lnTo>
-                <a:lnTo>
-                  <a:pt x="1" y="5095933"/>
-                </a:lnTo>
-                <a:lnTo>
-                  <a:pt x="1" y="4074529"/>
-                </a:lnTo>
-                <a:lnTo>
-                  <a:pt x="0" y="4074529"/>
-                </a:lnTo>
-                <a:lnTo>
-                  <a:pt x="0" y="2109542"/>
-                </a:lnTo>
-                <a:lnTo>
-                  <a:pt x="1" y="2109542"/>
-                </a:lnTo>
-                <a:close/>
-              </a:path>
-            </a:pathLst>
-          </a:custGeom>
-          <a:solidFill>
-            <a:schemeClr val="bg1"/>
-          </a:solidFill>
-          <a:ln>
-            <a:noFill/>
-          </a:ln>
-        </p:spPr>
-        <p:txBody>
-          <a:bodyPr/>
-          <a:lstStyle/>
-          <a:p>
-            <a:endParaRPr lang="en-GB"/>
-          </a:p>
-        </p:txBody>
-      </p:sp>
-      <p:graphicFrame>
-        <p:nvGraphicFramePr>
-          <p:cNvPr id="5" name="Content Placeholder 2">
-            <a:extLst>
-              <a:ext uri="{FF2B5EF4-FFF2-40B4-BE49-F238E27FC236}">
                 <a16:creationId xmlns:a16="http://schemas.microsoft.com/office/drawing/2014/main" id="{4C3111BA-1415-79E5-C9F5-31CECD9D6325}"/>
               </a:ext>
             </a:extLst>
@@ -36224,13 +36375,13 @@
             <p:ph idx="1"/>
             <p:extLst>
               <p:ext uri="{D42A27DB-BD31-4B8C-83A1-F6EECF244321}">
-                <p14:modId xmlns:p14="http://schemas.microsoft.com/office/powerpoint/2010/main" val="425469942"/>
+                <p14:modId xmlns:p14="http://schemas.microsoft.com/office/powerpoint/2010/main" val="509319546"/>
               </p:ext>
             </p:extLst>
           </p:nvPr>
         </p:nvGraphicFramePr>
         <p:xfrm>
-          <a:off x="486697" y="2810256"/>
+          <a:off x="486697" y="2125830"/>
           <a:ext cx="8171528" cy="3404277"/>
         </p:xfrm>
         <a:graphic>
@@ -36293,6 +36444,36 @@
           <a:xfrm>
             <a:off x="738187" y="6283007"/>
             <a:ext cx="7667625" cy="466725"/>
+          </a:xfrm>
+          <a:prstGeom prst="rect">
+            <a:avLst/>
+          </a:prstGeom>
+        </p:spPr>
+      </p:pic>
+      <p:pic>
+        <p:nvPicPr>
+          <p:cNvPr id="6" name="Immagine 5">
+            <a:extLst>
+              <a:ext uri="{FF2B5EF4-FFF2-40B4-BE49-F238E27FC236}">
+                <a16:creationId xmlns:a16="http://schemas.microsoft.com/office/drawing/2014/main" id="{F9A944CD-AF52-9B3A-BA8A-D71ED59B5B1D}"/>
+              </a:ext>
+            </a:extLst>
+          </p:cNvPr>
+          <p:cNvPicPr>
+            <a:picLocks noChangeAspect="1"/>
+          </p:cNvPicPr>
+          <p:nvPr/>
+        </p:nvPicPr>
+        <p:blipFill>
+          <a:blip r:embed="rId9"/>
+          <a:stretch>
+            <a:fillRect/>
+          </a:stretch>
+        </p:blipFill>
+        <p:spPr>
+          <a:xfrm>
+            <a:off x="-313" y="13232"/>
+            <a:ext cx="7316221" cy="685896"/>
           </a:xfrm>
           <a:prstGeom prst="rect">
             <a:avLst/>
@@ -36830,6 +37011,36 @@
           </a:prstGeom>
         </p:spPr>
       </p:pic>
+      <p:pic>
+        <p:nvPicPr>
+          <p:cNvPr id="6" name="Immagine 5">
+            <a:extLst>
+              <a:ext uri="{FF2B5EF4-FFF2-40B4-BE49-F238E27FC236}">
+                <a16:creationId xmlns:a16="http://schemas.microsoft.com/office/drawing/2014/main" id="{C9A98579-EE8B-87B8-3F4B-72929E19BB87}"/>
+              </a:ext>
+            </a:extLst>
+          </p:cNvPr>
+          <p:cNvPicPr>
+            <a:picLocks noChangeAspect="1"/>
+          </p:cNvPicPr>
+          <p:nvPr/>
+        </p:nvPicPr>
+        <p:blipFill>
+          <a:blip r:embed="rId4"/>
+          <a:stretch>
+            <a:fillRect/>
+          </a:stretch>
+        </p:blipFill>
+        <p:spPr>
+          <a:xfrm>
+            <a:off x="1" y="0"/>
+            <a:ext cx="5843016" cy="547783"/>
+          </a:xfrm>
+          <a:prstGeom prst="rect">
+            <a:avLst/>
+          </a:prstGeom>
+        </p:spPr>
+      </p:pic>
     </p:spTree>
     <p:extLst>
       <p:ext uri="{BB962C8B-B14F-4D97-AF65-F5344CB8AC3E}">
@@ -37249,18 +37460,48 @@
           </a:prstGeom>
         </p:spPr>
       </p:pic>
+      <p:pic>
+        <p:nvPicPr>
+          <p:cNvPr id="6" name="Immagine 5">
+            <a:extLst>
+              <a:ext uri="{FF2B5EF4-FFF2-40B4-BE49-F238E27FC236}">
+                <a16:creationId xmlns:a16="http://schemas.microsoft.com/office/drawing/2014/main" id="{7453D87A-717A-98E1-3725-BD6D61753FB5}"/>
+              </a:ext>
+            </a:extLst>
+          </p:cNvPr>
+          <p:cNvPicPr>
+            <a:picLocks noChangeAspect="1"/>
+          </p:cNvPicPr>
+          <p:nvPr/>
+        </p:nvPicPr>
+        <p:blipFill>
+          <a:blip r:embed="rId9"/>
+          <a:stretch>
+            <a:fillRect/>
+          </a:stretch>
+        </p:blipFill>
+        <p:spPr>
+          <a:xfrm>
+            <a:off x="2381250" y="0"/>
+            <a:ext cx="6762750" cy="685896"/>
+          </a:xfrm>
+          <a:prstGeom prst="rect">
+            <a:avLst/>
+          </a:prstGeom>
+        </p:spPr>
+      </p:pic>
     </p:spTree>
   </p:cSld>
   <p:clrMapOvr>
     <a:overrideClrMapping bg1="lt1" tx1="dk1" bg2="lt2" tx2="dk2" accent1="accent1" accent2="accent2" accent3="accent3" accent4="accent4" accent5="accent5" accent6="accent6" hlink="hlink" folHlink="folHlink"/>
   </p:clrMapOvr>
-  <mc:AlternateContent xmlns:mc="http://schemas.openxmlformats.org/markup-compatibility/2006">
-    <mc:Choice xmlns:p14="http://schemas.microsoft.com/office/powerpoint/2010/main" Requires="p14">
+  <mc:AlternateContent xmlns:mc="http://schemas.openxmlformats.org/markup-compatibility/2006" xmlns:p14="http://schemas.microsoft.com/office/powerpoint/2010/main">
+    <mc:Choice Requires="p14">
       <p:transition spd="med" p14:dur="700">
         <p:fade/>
       </p:transition>
     </mc:Choice>
-    <mc:Fallback>
+    <mc:Fallback xmlns="">
       <p:transition spd="med">
         <p:fade/>
       </p:transition>
@@ -37730,7 +37971,7 @@
         </p:nvSpPr>
         <p:spPr>
           <a:xfrm>
-            <a:off x="486697" y="629267"/>
+            <a:off x="486697" y="916184"/>
             <a:ext cx="6939116" cy="1016654"/>
           </a:xfrm>
         </p:spPr>
@@ -37741,12 +37982,20 @@
           <a:lstStyle/>
           <a:p>
             <a:r>
-              <a:rPr lang="en-GB">
+              <a:rPr lang="en-GB" dirty="0" err="1">
                 <a:solidFill>
                   <a:srgbClr val="EBEBEB"/>
                 </a:solidFill>
               </a:rPr>
-              <a:t>Oggetti vs Classi</a:t>
+              <a:t>Oggetti</a:t>
+            </a:r>
+            <a:r>
+              <a:rPr lang="en-GB" dirty="0">
+                <a:solidFill>
+                  <a:srgbClr val="EBEBEB"/>
+                </a:solidFill>
+              </a:rPr>
+              <a:t> vs Classi</a:t>
             </a:r>
           </a:p>
         </p:txBody>
@@ -38332,13 +38581,13 @@
             <p:ph idx="1"/>
             <p:extLst>
               <p:ext uri="{D42A27DB-BD31-4B8C-83A1-F6EECF244321}">
-                <p14:modId xmlns:p14="http://schemas.microsoft.com/office/powerpoint/2010/main" val="1583282435"/>
+                <p14:modId xmlns:p14="http://schemas.microsoft.com/office/powerpoint/2010/main" val="2120847162"/>
               </p:ext>
             </p:extLst>
           </p:nvPr>
         </p:nvGraphicFramePr>
         <p:xfrm>
-          <a:off x="486697" y="2810256"/>
+          <a:off x="486234" y="2286162"/>
           <a:ext cx="8171528" cy="3404277"/>
         </p:xfrm>
         <a:graphic>
@@ -38401,6 +38650,36 @@
           <a:xfrm>
             <a:off x="738186" y="6285971"/>
             <a:ext cx="7667625" cy="466725"/>
+          </a:xfrm>
+          <a:prstGeom prst="rect">
+            <a:avLst/>
+          </a:prstGeom>
+        </p:spPr>
+      </p:pic>
+      <p:pic>
+        <p:nvPicPr>
+          <p:cNvPr id="6" name="Immagine 5">
+            <a:extLst>
+              <a:ext uri="{FF2B5EF4-FFF2-40B4-BE49-F238E27FC236}">
+                <a16:creationId xmlns:a16="http://schemas.microsoft.com/office/drawing/2014/main" id="{BFE30B07-3351-C80D-F2FF-E3FBAF2FB30A}"/>
+              </a:ext>
+            </a:extLst>
+          </p:cNvPr>
+          <p:cNvPicPr>
+            <a:picLocks noChangeAspect="1"/>
+          </p:cNvPicPr>
+          <p:nvPr/>
+        </p:nvPicPr>
+        <p:blipFill>
+          <a:blip r:embed="rId9"/>
+          <a:stretch>
+            <a:fillRect/>
+          </a:stretch>
+        </p:blipFill>
+        <p:spPr>
+          <a:xfrm>
+            <a:off x="-313" y="15905"/>
+            <a:ext cx="7316221" cy="685896"/>
           </a:xfrm>
           <a:prstGeom prst="rect">
             <a:avLst/>
@@ -38802,7 +39081,7 @@
         </p:blipFill>
         <p:spPr>
           <a:xfrm>
-            <a:off x="20" y="-5"/>
+            <a:off x="20" y="789441"/>
             <a:ext cx="9143752" cy="5020241"/>
           </a:xfrm>
           <a:custGeom>
@@ -39922,6 +40201,36 @@
           <a:xfrm>
             <a:off x="738187" y="6391275"/>
             <a:ext cx="7667625" cy="466725"/>
+          </a:xfrm>
+          <a:prstGeom prst="rect">
+            <a:avLst/>
+          </a:prstGeom>
+        </p:spPr>
+      </p:pic>
+      <p:pic>
+        <p:nvPicPr>
+          <p:cNvPr id="6" name="Immagine 5">
+            <a:extLst>
+              <a:ext uri="{FF2B5EF4-FFF2-40B4-BE49-F238E27FC236}">
+                <a16:creationId xmlns:a16="http://schemas.microsoft.com/office/drawing/2014/main" id="{C7103418-1204-CEBF-64A9-4B1B67BA6192}"/>
+              </a:ext>
+            </a:extLst>
+          </p:cNvPr>
+          <p:cNvPicPr>
+            <a:picLocks noChangeAspect="1"/>
+          </p:cNvPicPr>
+          <p:nvPr/>
+        </p:nvPicPr>
+        <p:blipFill>
+          <a:blip r:embed="rId10"/>
+          <a:stretch>
+            <a:fillRect/>
+          </a:stretch>
+        </p:blipFill>
+        <p:spPr>
+          <a:xfrm>
+            <a:off x="0" y="-2045"/>
+            <a:ext cx="7316221" cy="685896"/>
           </a:xfrm>
           <a:prstGeom prst="rect">
             <a:avLst/>
@@ -41740,7 +42049,7 @@
         </p:nvSpPr>
         <p:spPr>
           <a:xfrm>
-            <a:off x="486697" y="629267"/>
+            <a:off x="486697" y="880547"/>
             <a:ext cx="6939116" cy="1016654"/>
           </a:xfrm>
         </p:spPr>
@@ -41751,12 +42060,36 @@
           <a:lstStyle/>
           <a:p>
             <a:r>
-              <a:rPr lang="en-GB">
+              <a:rPr lang="en-GB" dirty="0" err="1">
                 <a:solidFill>
                   <a:srgbClr val="EBEBEB"/>
                 </a:solidFill>
               </a:rPr>
-              <a:t>Struttura di una Classe</a:t>
+              <a:t>Struttura</a:t>
+            </a:r>
+            <a:r>
+              <a:rPr lang="en-GB" dirty="0">
+                <a:solidFill>
+                  <a:srgbClr val="EBEBEB"/>
+                </a:solidFill>
+              </a:rPr>
+              <a:t> di </a:t>
+            </a:r>
+            <a:r>
+              <a:rPr lang="en-GB" dirty="0" err="1">
+                <a:solidFill>
+                  <a:srgbClr val="EBEBEB"/>
+                </a:solidFill>
+              </a:rPr>
+              <a:t>una</a:t>
+            </a:r>
+            <a:r>
+              <a:rPr lang="en-GB" dirty="0">
+                <a:solidFill>
+                  <a:srgbClr val="EBEBEB"/>
+                </a:solidFill>
+              </a:rPr>
+              <a:t> Classe</a:t>
             </a:r>
           </a:p>
         </p:txBody>
@@ -42342,13 +42675,13 @@
             <p:ph idx="1"/>
             <p:extLst>
               <p:ext uri="{D42A27DB-BD31-4B8C-83A1-F6EECF244321}">
-                <p14:modId xmlns:p14="http://schemas.microsoft.com/office/powerpoint/2010/main" val="1618791407"/>
+                <p14:modId xmlns:p14="http://schemas.microsoft.com/office/powerpoint/2010/main" val="3243185692"/>
               </p:ext>
             </p:extLst>
           </p:nvPr>
         </p:nvGraphicFramePr>
         <p:xfrm>
-          <a:off x="486697" y="2810256"/>
+          <a:off x="486697" y="2407820"/>
           <a:ext cx="8171528" cy="3404277"/>
         </p:xfrm>
         <a:graphic>
@@ -42411,6 +42744,36 @@
           <a:xfrm>
             <a:off x="738187" y="6252857"/>
             <a:ext cx="7667625" cy="466725"/>
+          </a:xfrm>
+          <a:prstGeom prst="rect">
+            <a:avLst/>
+          </a:prstGeom>
+        </p:spPr>
+      </p:pic>
+      <p:pic>
+        <p:nvPicPr>
+          <p:cNvPr id="6" name="Immagine 5">
+            <a:extLst>
+              <a:ext uri="{FF2B5EF4-FFF2-40B4-BE49-F238E27FC236}">
+                <a16:creationId xmlns:a16="http://schemas.microsoft.com/office/drawing/2014/main" id="{67D4E8AB-94D2-BAF2-FDF0-2B0418090690}"/>
+              </a:ext>
+            </a:extLst>
+          </p:cNvPr>
+          <p:cNvPicPr>
+            <a:picLocks noChangeAspect="1"/>
+          </p:cNvPicPr>
+          <p:nvPr/>
+        </p:nvPicPr>
+        <p:blipFill>
+          <a:blip r:embed="rId9"/>
+          <a:stretch>
+            <a:fillRect/>
+          </a:stretch>
+        </p:blipFill>
+        <p:spPr>
+          <a:xfrm>
+            <a:off x="-313" y="0"/>
+            <a:ext cx="7316221" cy="685896"/>
           </a:xfrm>
           <a:prstGeom prst="rect">
             <a:avLst/>
@@ -42902,6 +43265,36 @@
           </a:prstGeom>
         </p:spPr>
       </p:pic>
+      <p:pic>
+        <p:nvPicPr>
+          <p:cNvPr id="6" name="Immagine 5">
+            <a:extLst>
+              <a:ext uri="{FF2B5EF4-FFF2-40B4-BE49-F238E27FC236}">
+                <a16:creationId xmlns:a16="http://schemas.microsoft.com/office/drawing/2014/main" id="{4040AC51-2787-C42F-5C9B-4BE11A3B16C0}"/>
+              </a:ext>
+            </a:extLst>
+          </p:cNvPr>
+          <p:cNvPicPr>
+            <a:picLocks noChangeAspect="1"/>
+          </p:cNvPicPr>
+          <p:nvPr/>
+        </p:nvPicPr>
+        <p:blipFill>
+          <a:blip r:embed="rId6"/>
+          <a:stretch>
+            <a:fillRect/>
+          </a:stretch>
+        </p:blipFill>
+        <p:spPr>
+          <a:xfrm>
+            <a:off x="2743203" y="524081"/>
+            <a:ext cx="6008741" cy="685896"/>
+          </a:xfrm>
+          <a:prstGeom prst="rect">
+            <a:avLst/>
+          </a:prstGeom>
+        </p:spPr>
+      </p:pic>
     </p:spTree>
   </p:cSld>
   <p:clrMapOvr>
@@ -43396,6 +43789,36 @@
           <a:xfrm>
             <a:off x="736996" y="6292799"/>
             <a:ext cx="7667625" cy="466725"/>
+          </a:xfrm>
+          <a:prstGeom prst="rect">
+            <a:avLst/>
+          </a:prstGeom>
+        </p:spPr>
+      </p:pic>
+      <p:pic>
+        <p:nvPicPr>
+          <p:cNvPr id="6" name="Immagine 5">
+            <a:extLst>
+              <a:ext uri="{FF2B5EF4-FFF2-40B4-BE49-F238E27FC236}">
+                <a16:creationId xmlns:a16="http://schemas.microsoft.com/office/drawing/2014/main" id="{053E13C1-410E-A38C-FEA8-B7F39AB962FC}"/>
+              </a:ext>
+            </a:extLst>
+          </p:cNvPr>
+          <p:cNvPicPr>
+            <a:picLocks noChangeAspect="1"/>
+          </p:cNvPicPr>
+          <p:nvPr/>
+        </p:nvPicPr>
+        <p:blipFill>
+          <a:blip r:embed="rId6"/>
+          <a:stretch>
+            <a:fillRect/>
+          </a:stretch>
+        </p:blipFill>
+        <p:spPr>
+          <a:xfrm>
+            <a:off x="2523746" y="487613"/>
+            <a:ext cx="6206883" cy="685896"/>
           </a:xfrm>
           <a:prstGeom prst="rect">
             <a:avLst/>
@@ -43856,6 +44279,36 @@
           <a:xfrm>
             <a:off x="223783" y="434924"/>
             <a:ext cx="2381250" cy="2428875"/>
+          </a:xfrm>
+          <a:prstGeom prst="rect">
+            <a:avLst/>
+          </a:prstGeom>
+        </p:spPr>
+      </p:pic>
+      <p:pic>
+        <p:nvPicPr>
+          <p:cNvPr id="6" name="Immagine 5">
+            <a:extLst>
+              <a:ext uri="{FF2B5EF4-FFF2-40B4-BE49-F238E27FC236}">
+                <a16:creationId xmlns:a16="http://schemas.microsoft.com/office/drawing/2014/main" id="{B4584ED1-29DA-771E-186A-4486B8C075E8}"/>
+              </a:ext>
+            </a:extLst>
+          </p:cNvPr>
+          <p:cNvPicPr>
+            <a:picLocks noChangeAspect="1"/>
+          </p:cNvPicPr>
+          <p:nvPr/>
+        </p:nvPicPr>
+        <p:blipFill>
+          <a:blip r:embed="rId5"/>
+          <a:stretch>
+            <a:fillRect/>
+          </a:stretch>
+        </p:blipFill>
+        <p:spPr>
+          <a:xfrm>
+            <a:off x="2679193" y="461724"/>
+            <a:ext cx="6072751" cy="685896"/>
           </a:xfrm>
           <a:prstGeom prst="rect">
             <a:avLst/>
